--- a/python-course-ppt/逐节课件/Python讲授课件-单元04.pptx
+++ b/python-course-ppt/逐节课件/Python讲授课件-单元04.pptx
@@ -234,1038 +234,6 @@
     </a:lvl9pPr>
   </p:notesStyle>
 </p:notesMaster>
-</file>
-
-<file path=ppt/notesSlides/notesSlide1.xml><?xml version="1.0" encoding="utf-8"?>
-<p:notes xmlns:a="http://schemas.openxmlformats.org/drawingml/2006/main" xmlns:p="http://schemas.openxmlformats.org/presentationml/2006/main" xmlns:r="http://schemas.openxmlformats.org/officeDocument/2006/relationships">
-  <p:cSld>
-    <p:spTree>
-      <p:nvGrpSpPr>
-        <p:cNvPr id="1" name=""/>
-        <p:cNvGrpSpPr/>
-        <p:nvPr/>
-      </p:nvGrpSpPr>
-      <p:grpSpPr>
-        <a:xfrm>
-          <a:off x="0" y="0"/>
-          <a:ext cx="0" cy="0"/>
-          <a:chOff x="0" y="0"/>
-          <a:chExt cx="0" cy="0"/>
-        </a:xfrm>
-      </p:grpSpPr>
-      <p:sp>
-        <p:nvSpPr>
-          <p:cNvPr id="2" name="讲课提示"/>
-          <p:cNvSpPr txBox="1"/>
-          <p:nvPr/>
-        </p:nvSpPr>
-        <p:spPr>
-          <a:xfrm>
-            <a:off x="457200" y="457200"/>
-            <a:ext cx="6858000" cy="4800600"/>
-          </a:xfrm>
-          <a:prstGeom prst="rect">
-            <a:avLst/>
-          </a:prstGeom>
-        </p:spPr>
-        <p:txBody>
-          <a:bodyPr wrap="square"/>
-          <a:lstStyle/>
-          <a:p>
-            <a:r>
-              <a:rPr lang="zh-CN" dirty="0"/>
-              <a:t>单元 4 · 单元 4 · if 语句</a:t>
-            </a:r>
-          </a:p>
-          <a:p>
-            <a:r>
-              <a:rPr lang="zh-CN" dirty="0"/>
-              <a:t/>
-            </a:r>
-          </a:p>
-          <a:p>
-            <a:r>
-              <a:rPr lang="zh-CN" dirty="0"/>
-              <a:t>本单元包含以下课节：</a:t>
-            </a:r>
-          </a:p>
-          <a:p>
-            <a:r>
-              <a:rPr lang="zh-CN" dirty="0"/>
-              <a:t>· 第 19 节 条件测试与比较运算</a:t>
-            </a:r>
-          </a:p>
-          <a:p>
-            <a:r>
-              <a:rPr lang="zh-CN" dirty="0"/>
-              <a:t>· 第 20 节 三分支结构与逻辑运算符</a:t>
-            </a:r>
-          </a:p>
-          <a:p>
-            <a:r>
-              <a:rPr lang="zh-CN" dirty="0"/>
-              <a:t>· 第 21 节 链式比较、is 与条件表达式</a:t>
-            </a:r>
-          </a:p>
-          <a:p>
-            <a:r>
-              <a:rPr lang="zh-CN" dirty="0"/>
-              <a:t>· 第 22 节 动手实战、答案与验收</a:t>
-            </a:r>
-          </a:p>
-          <a:p>
-            <a:r>
-              <a:rPr lang="zh-CN" dirty="0"/>
-              <a:t/>
-            </a:r>
-          </a:p>
-          <a:p>
-            <a:r>
-              <a:rPr lang="zh-CN" dirty="0"/>
-              <a:t>开场用 3 分钟讲清：这个单元学完能做出什么，最后会被关卡怎么验。</a:t>
-            </a:r>
-          </a:p>
-        </p:txBody>
-      </p:sp>
-    </p:spTree>
-  </p:cSld>
-  <p:clrMapOvr>
-    <a:masterClrMapping/>
-  </p:clrMapOvr>
-</p:notes>
-</file>
-
-<file path=ppt/notesSlides/notesSlide10.xml><?xml version="1.0" encoding="utf-8"?>
-<p:notes xmlns:a="http://schemas.openxmlformats.org/drawingml/2006/main" xmlns:p="http://schemas.openxmlformats.org/presentationml/2006/main" xmlns:r="http://schemas.openxmlformats.org/officeDocument/2006/relationships">
-  <p:cSld>
-    <p:spTree>
-      <p:nvGrpSpPr>
-        <p:cNvPr id="1" name=""/>
-        <p:cNvGrpSpPr/>
-        <p:nvPr/>
-      </p:nvGrpSpPr>
-      <p:grpSpPr>
-        <a:xfrm>
-          <a:off x="0" y="0"/>
-          <a:ext cx="0" cy="0"/>
-          <a:chOff x="0" y="0"/>
-          <a:chExt cx="0" cy="0"/>
-        </a:xfrm>
-      </p:grpSpPr>
-      <p:sp>
-        <p:nvSpPr>
-          <p:cNvPr id="2" name="讲课提示"/>
-          <p:cNvSpPr txBox="1"/>
-          <p:nvPr/>
-        </p:nvSpPr>
-        <p:spPr>
-          <a:xfrm>
-            <a:off x="457200" y="457200"/>
-            <a:ext cx="6858000" cy="4800600"/>
-          </a:xfrm>
-          <a:prstGeom prst="rect">
-            <a:avLst/>
-          </a:prstGeom>
-        </p:spPr>
-        <p:txBody>
-          <a:bodyPr wrap="square"/>
-          <a:lstStyle/>
-          <a:p>
-            <a:r>
-              <a:rPr lang="zh-CN" dirty="0"/>
-              <a:t>单元 4 小结 · 单元 4 · 小结</a:t>
-            </a:r>
-          </a:p>
-          <a:p>
-            <a:r>
-              <a:rPr lang="zh-CN" dirty="0"/>
-              <a:t/>
-            </a:r>
-          </a:p>
-          <a:p>
-            <a:r>
-              <a:rPr lang="zh-CN" dirty="0"/>
-              <a:t>收尾动作：让学生合上讲义，口述本单元三个最重要的结论；说不出来的，回对应课节。</a:t>
-            </a:r>
-          </a:p>
-          <a:p>
-            <a:r>
-              <a:rPr lang="zh-CN" dirty="0"/>
-              <a:t>然后当场勾一遍本单元课节的「已完成」，没打勾的进下一单元前补掉。</a:t>
-            </a:r>
-          </a:p>
-        </p:txBody>
-      </p:sp>
-    </p:spTree>
-  </p:cSld>
-  <p:clrMapOvr>
-    <a:masterClrMapping/>
-  </p:clrMapOvr>
-</p:notes>
-</file>
-
-<file path=ppt/notesSlides/notesSlide2.xml><?xml version="1.0" encoding="utf-8"?>
-<p:notes xmlns:a="http://schemas.openxmlformats.org/drawingml/2006/main" xmlns:p="http://schemas.openxmlformats.org/presentationml/2006/main" xmlns:r="http://schemas.openxmlformats.org/officeDocument/2006/relationships">
-  <p:cSld>
-    <p:spTree>
-      <p:nvGrpSpPr>
-        <p:cNvPr id="1" name=""/>
-        <p:cNvGrpSpPr/>
-        <p:nvPr/>
-      </p:nvGrpSpPr>
-      <p:grpSpPr>
-        <a:xfrm>
-          <a:off x="0" y="0"/>
-          <a:ext cx="0" cy="0"/>
-          <a:chOff x="0" y="0"/>
-          <a:chExt cx="0" cy="0"/>
-        </a:xfrm>
-      </p:grpSpPr>
-      <p:sp>
-        <p:nvSpPr>
-          <p:cNvPr id="2" name="讲课提示"/>
-          <p:cNvSpPr txBox="1"/>
-          <p:nvPr/>
-        </p:nvSpPr>
-        <p:spPr>
-          <a:xfrm>
-            <a:off x="457200" y="457200"/>
-            <a:ext cx="6858000" cy="4800600"/>
-          </a:xfrm>
-          <a:prstGeom prst="rect">
-            <a:avLst/>
-          </a:prstGeom>
-        </p:spPr>
-        <p:txBody>
-          <a:bodyPr wrap="square"/>
-          <a:lstStyle/>
-          <a:p>
-            <a:r>
-              <a:rPr lang="zh-CN" dirty="0"/>
-              <a:t>第 19 节 · 条件测试与比较运算</a:t>
-            </a:r>
-          </a:p>
-          <a:p>
-            <a:r>
-              <a:rPr lang="zh-CN" dirty="0"/>
-              <a:t>单元 4 · if 语句 · W4</a:t>
-            </a:r>
-          </a:p>
-          <a:p>
-            <a:r>
-              <a:rPr lang="zh-CN" dirty="0"/>
-              <a:t/>
-            </a:r>
-          </a:p>
-          <a:p>
-            <a:r>
-              <a:rPr lang="zh-CN" dirty="0"/>
-              <a:t>学习目标：掌握六个比较运算符和 in / not in</a:t>
-            </a:r>
-          </a:p>
-          <a:p>
-            <a:r>
-              <a:rPr lang="zh-CN" dirty="0"/>
-              <a:t/>
-            </a:r>
-          </a:p>
-          <a:p>
-            <a:r>
-              <a:rPr lang="zh-CN" dirty="0"/>
-              <a:t>课堂实操（40 分钟，不看答案）：</a:t>
-            </a:r>
-          </a:p>
-          <a:p>
-            <a:r>
-              <a:rPr lang="zh-CN" dirty="0"/>
-              <a:t>· 现场预测 8 个表达式的 True/False 再验证</a:t>
-            </a:r>
-          </a:p>
-          <a:p>
-            <a:r>
-              <a:rPr lang="zh-CN" dirty="0"/>
-              <a:t>· 故意用 is 比较字符串看结果</a:t>
-            </a:r>
-          </a:p>
-          <a:p>
-            <a:r>
-              <a:rPr lang="zh-CN" dirty="0"/>
-              <a:t/>
-            </a:r>
-          </a:p>
-          <a:p>
-            <a:r>
-              <a:rPr lang="zh-CN" dirty="0"/>
-              <a:t>课后作业：</a:t>
-            </a:r>
-          </a:p>
-          <a:p>
-            <a:r>
-              <a:rPr lang="zh-CN" dirty="0"/>
-              <a:t>· 完成动手练习 4-1 ~ 4-2</a:t>
-            </a:r>
-          </a:p>
-          <a:p>
-            <a:r>
-              <a:rPr lang="zh-CN" dirty="0"/>
-              <a:t/>
-            </a:r>
-          </a:p>
-          <a:p>
-            <a:r>
-              <a:rPr lang="zh-CN" dirty="0"/>
-              <a:t>节奏：讲 20 分钟 → 学员自己敲 40 分钟（不看答案）→ 对讲评自查 20 分钟 → 写作业 10 分钟。</a:t>
-            </a:r>
-          </a:p>
-        </p:txBody>
-      </p:sp>
-    </p:spTree>
-  </p:cSld>
-  <p:clrMapOvr>
-    <a:masterClrMapping/>
-  </p:clrMapOvr>
-</p:notes>
-</file>
-
-<file path=ppt/notesSlides/notesSlide3.xml><?xml version="1.0" encoding="utf-8"?>
-<p:notes xmlns:a="http://schemas.openxmlformats.org/drawingml/2006/main" xmlns:p="http://schemas.openxmlformats.org/presentationml/2006/main" xmlns:r="http://schemas.openxmlformats.org/officeDocument/2006/relationships">
-  <p:cSld>
-    <p:spTree>
-      <p:nvGrpSpPr>
-        <p:cNvPr id="1" name=""/>
-        <p:cNvGrpSpPr/>
-        <p:nvPr/>
-      </p:nvGrpSpPr>
-      <p:grpSpPr>
-        <a:xfrm>
-          <a:off x="0" y="0"/>
-          <a:ext cx="0" cy="0"/>
-          <a:chOff x="0" y="0"/>
-          <a:chExt cx="0" cy="0"/>
-        </a:xfrm>
-      </p:grpSpPr>
-      <p:sp>
-        <p:nvSpPr>
-          <p:cNvPr id="2" name="讲课提示"/>
-          <p:cNvSpPr txBox="1"/>
-          <p:nvPr/>
-        </p:nvSpPr>
-        <p:spPr>
-          <a:xfrm>
-            <a:off x="457200" y="457200"/>
-            <a:ext cx="6858000" cy="4800600"/>
-          </a:xfrm>
-          <a:prstGeom prst="rect">
-            <a:avLst/>
-          </a:prstGeom>
-        </p:spPr>
-        <p:txBody>
-          <a:bodyPr wrap="square"/>
-          <a:lstStyle/>
-          <a:p>
-            <a:r>
-              <a:rPr lang="zh-CN" dirty="0"/>
-              <a:t>第 19 节 · 核心知识点：条件测试与比较运算</a:t>
-            </a:r>
-          </a:p>
-          <a:p>
-            <a:r>
-              <a:rPr lang="zh-CN" dirty="0"/>
-              <a:t/>
-            </a:r>
-          </a:p>
-          <a:p>
-            <a:r>
-              <a:rPr lang="zh-CN" dirty="0"/>
-              <a:t>讲这一页时：先让学生说出上节课的结论，再逐块讲要点。</a:t>
-            </a:r>
-          </a:p>
-          <a:p>
-            <a:r>
-              <a:rPr lang="zh-CN" dirty="0"/>
-              <a:t>每讲完一块，问一句「这一步如果写错了，报错会长什么样？」——把错误提前讲。</a:t>
-            </a:r>
-          </a:p>
-          <a:p>
-            <a:r>
-              <a:rPr lang="zh-CN" dirty="0"/>
-              <a:t/>
-            </a:r>
-          </a:p>
-          <a:p>
-            <a:r>
-              <a:rPr lang="zh-CN" dirty="0"/>
-              <a:t>本节目标：掌握六个比较运算符和 in / not in</a:t>
-            </a:r>
-          </a:p>
-          <a:p>
-            <a:r>
-              <a:rPr lang="zh-CN" dirty="0"/>
-              <a:t/>
-            </a:r>
-          </a:p>
-          <a:p>
-            <a:r>
-              <a:rPr lang="zh-CN" dirty="0"/>
-              <a:t>看不到懂的地方，回讲义对应小节读一遍，再回来对着这页复述一次——能讲出来才算真懂。</a:t>
-            </a:r>
-          </a:p>
-        </p:txBody>
-      </p:sp>
-    </p:spTree>
-  </p:cSld>
-  <p:clrMapOvr>
-    <a:masterClrMapping/>
-  </p:clrMapOvr>
-</p:notes>
-</file>
-
-<file path=ppt/notesSlides/notesSlide4.xml><?xml version="1.0" encoding="utf-8"?>
-<p:notes xmlns:a="http://schemas.openxmlformats.org/drawingml/2006/main" xmlns:p="http://schemas.openxmlformats.org/presentationml/2006/main" xmlns:r="http://schemas.openxmlformats.org/officeDocument/2006/relationships">
-  <p:cSld>
-    <p:spTree>
-      <p:nvGrpSpPr>
-        <p:cNvPr id="1" name=""/>
-        <p:cNvGrpSpPr/>
-        <p:nvPr/>
-      </p:nvGrpSpPr>
-      <p:grpSpPr>
-        <a:xfrm>
-          <a:off x="0" y="0"/>
-          <a:ext cx="0" cy="0"/>
-          <a:chOff x="0" y="0"/>
-          <a:chExt cx="0" cy="0"/>
-        </a:xfrm>
-      </p:grpSpPr>
-      <p:sp>
-        <p:nvSpPr>
-          <p:cNvPr id="2" name="讲课提示"/>
-          <p:cNvSpPr txBox="1"/>
-          <p:nvPr/>
-        </p:nvSpPr>
-        <p:spPr>
-          <a:xfrm>
-            <a:off x="457200" y="457200"/>
-            <a:ext cx="6858000" cy="4800600"/>
-          </a:xfrm>
-          <a:prstGeom prst="rect">
-            <a:avLst/>
-          </a:prstGeom>
-        </p:spPr>
-        <p:txBody>
-          <a:bodyPr wrap="square"/>
-          <a:lstStyle/>
-          <a:p>
-            <a:r>
-              <a:rPr lang="zh-CN" dirty="0"/>
-              <a:t>第 20 节 · 三分支结构与逻辑运算符</a:t>
-            </a:r>
-          </a:p>
-          <a:p>
-            <a:r>
-              <a:rPr lang="zh-CN" dirty="0"/>
-              <a:t>单元 4 · if 语句 · W4</a:t>
-            </a:r>
-          </a:p>
-          <a:p>
-            <a:r>
-              <a:rPr lang="zh-CN" dirty="0"/>
-              <a:t/>
-            </a:r>
-          </a:p>
-          <a:p>
-            <a:r>
-              <a:rPr lang="zh-CN" dirty="0"/>
-              <a:t>学习目标：掌握 if / elif / else 与 and / or / not，理解顺序为什么重要</a:t>
-            </a:r>
-          </a:p>
-          <a:p>
-            <a:r>
-              <a:rPr lang="zh-CN" dirty="0"/>
-              <a:t/>
-            </a:r>
-          </a:p>
-          <a:p>
-            <a:r>
-              <a:rPr lang="zh-CN" dirty="0"/>
-              <a:t>课堂实操（40 分钟，不看答案）：</a:t>
-            </a:r>
-          </a:p>
-          <a:p>
-            <a:r>
-              <a:rPr lang="zh-CN" dirty="0"/>
-              <a:t>· 写一个票价分级程序，故意把条件顺序写反看结果</a:t>
-            </a:r>
-          </a:p>
-          <a:p>
-            <a:r>
-              <a:rPr lang="zh-CN" dirty="0"/>
-              <a:t>· 演示短路求值</a:t>
-            </a:r>
-          </a:p>
-          <a:p>
-            <a:r>
-              <a:rPr lang="zh-CN" dirty="0"/>
-              <a:t/>
-            </a:r>
-          </a:p>
-          <a:p>
-            <a:r>
-              <a:rPr lang="zh-CN" dirty="0"/>
-              <a:t>课后作业：</a:t>
-            </a:r>
-          </a:p>
-          <a:p>
-            <a:r>
-              <a:rPr lang="zh-CN" dirty="0"/>
-              <a:t>· 完成动手练习 4-3 ~ 4-5</a:t>
-            </a:r>
-          </a:p>
-          <a:p>
-            <a:r>
-              <a:rPr lang="zh-CN" dirty="0"/>
-              <a:t/>
-            </a:r>
-          </a:p>
-          <a:p>
-            <a:r>
-              <a:rPr lang="zh-CN" dirty="0"/>
-              <a:t>节奏：讲 20 分钟 → 学员自己敲 40 分钟（不看答案）→ 对讲评自查 20 分钟 → 写作业 10 分钟。</a:t>
-            </a:r>
-          </a:p>
-        </p:txBody>
-      </p:sp>
-    </p:spTree>
-  </p:cSld>
-  <p:clrMapOvr>
-    <a:masterClrMapping/>
-  </p:clrMapOvr>
-</p:notes>
-</file>
-
-<file path=ppt/notesSlides/notesSlide5.xml><?xml version="1.0" encoding="utf-8"?>
-<p:notes xmlns:a="http://schemas.openxmlformats.org/drawingml/2006/main" xmlns:p="http://schemas.openxmlformats.org/presentationml/2006/main" xmlns:r="http://schemas.openxmlformats.org/officeDocument/2006/relationships">
-  <p:cSld>
-    <p:spTree>
-      <p:nvGrpSpPr>
-        <p:cNvPr id="1" name=""/>
-        <p:cNvGrpSpPr/>
-        <p:nvPr/>
-      </p:nvGrpSpPr>
-      <p:grpSpPr>
-        <a:xfrm>
-          <a:off x="0" y="0"/>
-          <a:ext cx="0" cy="0"/>
-          <a:chOff x="0" y="0"/>
-          <a:chExt cx="0" cy="0"/>
-        </a:xfrm>
-      </p:grpSpPr>
-      <p:sp>
-        <p:nvSpPr>
-          <p:cNvPr id="2" name="讲课提示"/>
-          <p:cNvSpPr txBox="1"/>
-          <p:nvPr/>
-        </p:nvSpPr>
-        <p:spPr>
-          <a:xfrm>
-            <a:off x="457200" y="457200"/>
-            <a:ext cx="6858000" cy="4800600"/>
-          </a:xfrm>
-          <a:prstGeom prst="rect">
-            <a:avLst/>
-          </a:prstGeom>
-        </p:spPr>
-        <p:txBody>
-          <a:bodyPr wrap="square"/>
-          <a:lstStyle/>
-          <a:p>
-            <a:r>
-              <a:rPr lang="zh-CN" dirty="0"/>
-              <a:t>第 20 节 · 核心知识点：三分支结构与逻辑运算符</a:t>
-            </a:r>
-          </a:p>
-          <a:p>
-            <a:r>
-              <a:rPr lang="zh-CN" dirty="0"/>
-              <a:t/>
-            </a:r>
-          </a:p>
-          <a:p>
-            <a:r>
-              <a:rPr lang="zh-CN" dirty="0"/>
-              <a:t>讲这一页时：先让学生说出上节课的结论，再逐块讲要点。</a:t>
-            </a:r>
-          </a:p>
-          <a:p>
-            <a:r>
-              <a:rPr lang="zh-CN" dirty="0"/>
-              <a:t>每讲完一块，问一句「这一步如果写错了，报错会长什么样？」——把错误提前讲。</a:t>
-            </a:r>
-          </a:p>
-          <a:p>
-            <a:r>
-              <a:rPr lang="zh-CN" dirty="0"/>
-              <a:t/>
-            </a:r>
-          </a:p>
-          <a:p>
-            <a:r>
-              <a:rPr lang="zh-CN" dirty="0"/>
-              <a:t>本节目标：掌握 if / elif / else 与 and / or / not，理解顺序为什么重要</a:t>
-            </a:r>
-          </a:p>
-          <a:p>
-            <a:r>
-              <a:rPr lang="zh-CN" dirty="0"/>
-              <a:t/>
-            </a:r>
-          </a:p>
-          <a:p>
-            <a:r>
-              <a:rPr lang="zh-CN" dirty="0"/>
-              <a:t>看不到懂的地方，回讲义对应小节读一遍，再回来对着这页复述一次——能讲出来才算真懂。</a:t>
-            </a:r>
-          </a:p>
-        </p:txBody>
-      </p:sp>
-    </p:spTree>
-  </p:cSld>
-  <p:clrMapOvr>
-    <a:masterClrMapping/>
-  </p:clrMapOvr>
-</p:notes>
-</file>
-
-<file path=ppt/notesSlides/notesSlide6.xml><?xml version="1.0" encoding="utf-8"?>
-<p:notes xmlns:a="http://schemas.openxmlformats.org/drawingml/2006/main" xmlns:p="http://schemas.openxmlformats.org/presentationml/2006/main" xmlns:r="http://schemas.openxmlformats.org/officeDocument/2006/relationships">
-  <p:cSld>
-    <p:spTree>
-      <p:nvGrpSpPr>
-        <p:cNvPr id="1" name=""/>
-        <p:cNvGrpSpPr/>
-        <p:nvPr/>
-      </p:nvGrpSpPr>
-      <p:grpSpPr>
-        <a:xfrm>
-          <a:off x="0" y="0"/>
-          <a:ext cx="0" cy="0"/>
-          <a:chOff x="0" y="0"/>
-          <a:chExt cx="0" cy="0"/>
-        </a:xfrm>
-      </p:grpSpPr>
-      <p:sp>
-        <p:nvSpPr>
-          <p:cNvPr id="2" name="讲课提示"/>
-          <p:cNvSpPr txBox="1"/>
-          <p:nvPr/>
-        </p:nvSpPr>
-        <p:spPr>
-          <a:xfrm>
-            <a:off x="457200" y="457200"/>
-            <a:ext cx="6858000" cy="4800600"/>
-          </a:xfrm>
-          <a:prstGeom prst="rect">
-            <a:avLst/>
-          </a:prstGeom>
-        </p:spPr>
-        <p:txBody>
-          <a:bodyPr wrap="square"/>
-          <a:lstStyle/>
-          <a:p>
-            <a:r>
-              <a:rPr lang="zh-CN" dirty="0"/>
-              <a:t>第 21 节 · 链式比较、is 与条件表达式</a:t>
-            </a:r>
-          </a:p>
-          <a:p>
-            <a:r>
-              <a:rPr lang="zh-CN" dirty="0"/>
-              <a:t>单元 4 · if 语句 · W4</a:t>
-            </a:r>
-          </a:p>
-          <a:p>
-            <a:r>
-              <a:rPr lang="zh-CN" dirty="0"/>
-              <a:t/>
-            </a:r>
-          </a:p>
-          <a:p>
-            <a:r>
-              <a:rPr lang="zh-CN" dirty="0"/>
-              <a:t>学习目标：能用链式比较、== 与 is、条件表达式写出更干净的判断</a:t>
-            </a:r>
-          </a:p>
-          <a:p>
-            <a:r>
-              <a:rPr lang="zh-CN" dirty="0"/>
-              <a:t/>
-            </a:r>
-          </a:p>
-          <a:p>
-            <a:r>
-              <a:rPr lang="zh-CN" dirty="0"/>
-              <a:t>课堂实操（40 分钟，不看答案）：</a:t>
-            </a:r>
-          </a:p>
-          <a:p>
-            <a:r>
-              <a:rPr lang="zh-CN" dirty="0"/>
-              <a:t>· 把嵌套 if 改成 elif 链和条件表达式两种写法</a:t>
-            </a:r>
-          </a:p>
-          <a:p>
-            <a:r>
-              <a:rPr lang="zh-CN" dirty="0"/>
-              <a:t/>
-            </a:r>
-          </a:p>
-          <a:p>
-            <a:r>
-              <a:rPr lang="zh-CN" dirty="0"/>
-              <a:t>课后作业：</a:t>
-            </a:r>
-          </a:p>
-          <a:p>
-            <a:r>
-              <a:rPr lang="zh-CN" dirty="0"/>
-              <a:t>· 完成动手练习进阶档 4-6 ~ 4-8</a:t>
-            </a:r>
-          </a:p>
-          <a:p>
-            <a:r>
-              <a:rPr lang="zh-CN" dirty="0"/>
-              <a:t/>
-            </a:r>
-          </a:p>
-          <a:p>
-            <a:r>
-              <a:rPr lang="zh-CN" dirty="0"/>
-              <a:t>节奏：讲 20 分钟 → 学员自己敲 40 分钟（不看答案）→ 对讲评自查 20 分钟 → 写作业 10 分钟。</a:t>
-            </a:r>
-          </a:p>
-        </p:txBody>
-      </p:sp>
-    </p:spTree>
-  </p:cSld>
-  <p:clrMapOvr>
-    <a:masterClrMapping/>
-  </p:clrMapOvr>
-</p:notes>
-</file>
-
-<file path=ppt/notesSlides/notesSlide7.xml><?xml version="1.0" encoding="utf-8"?>
-<p:notes xmlns:a="http://schemas.openxmlformats.org/drawingml/2006/main" xmlns:p="http://schemas.openxmlformats.org/presentationml/2006/main" xmlns:r="http://schemas.openxmlformats.org/officeDocument/2006/relationships">
-  <p:cSld>
-    <p:spTree>
-      <p:nvGrpSpPr>
-        <p:cNvPr id="1" name=""/>
-        <p:cNvGrpSpPr/>
-        <p:nvPr/>
-      </p:nvGrpSpPr>
-      <p:grpSpPr>
-        <a:xfrm>
-          <a:off x="0" y="0"/>
-          <a:ext cx="0" cy="0"/>
-          <a:chOff x="0" y="0"/>
-          <a:chExt cx="0" cy="0"/>
-        </a:xfrm>
-      </p:grpSpPr>
-      <p:sp>
-        <p:nvSpPr>
-          <p:cNvPr id="2" name="讲课提示"/>
-          <p:cNvSpPr txBox="1"/>
-          <p:nvPr/>
-        </p:nvSpPr>
-        <p:spPr>
-          <a:xfrm>
-            <a:off x="457200" y="457200"/>
-            <a:ext cx="6858000" cy="4800600"/>
-          </a:xfrm>
-          <a:prstGeom prst="rect">
-            <a:avLst/>
-          </a:prstGeom>
-        </p:spPr>
-        <p:txBody>
-          <a:bodyPr wrap="square"/>
-          <a:lstStyle/>
-          <a:p>
-            <a:r>
-              <a:rPr lang="zh-CN" dirty="0"/>
-              <a:t>第 21 节 · 核心知识点：链式比较、is 与条件表达式</a:t>
-            </a:r>
-          </a:p>
-          <a:p>
-            <a:r>
-              <a:rPr lang="zh-CN" dirty="0"/>
-              <a:t/>
-            </a:r>
-          </a:p>
-          <a:p>
-            <a:r>
-              <a:rPr lang="zh-CN" dirty="0"/>
-              <a:t>讲这一页时：先让学生说出上节课的结论，再逐块讲要点。</a:t>
-            </a:r>
-          </a:p>
-          <a:p>
-            <a:r>
-              <a:rPr lang="zh-CN" dirty="0"/>
-              <a:t>每讲完一块，问一句「这一步如果写错了，报错会长什么样？」——把错误提前讲。</a:t>
-            </a:r>
-          </a:p>
-          <a:p>
-            <a:r>
-              <a:rPr lang="zh-CN" dirty="0"/>
-              <a:t/>
-            </a:r>
-          </a:p>
-          <a:p>
-            <a:r>
-              <a:rPr lang="zh-CN" dirty="0"/>
-              <a:t>本节目标：能用链式比较、== 与 is、条件表达式写出更干净的判断</a:t>
-            </a:r>
-          </a:p>
-          <a:p>
-            <a:r>
-              <a:rPr lang="zh-CN" dirty="0"/>
-              <a:t/>
-            </a:r>
-          </a:p>
-          <a:p>
-            <a:r>
-              <a:rPr lang="zh-CN" dirty="0"/>
-              <a:t>看不到懂的地方，回讲义对应小节读一遍，再回来对着这页复述一次——能讲出来才算真懂。</a:t>
-            </a:r>
-          </a:p>
-        </p:txBody>
-      </p:sp>
-    </p:spTree>
-  </p:cSld>
-  <p:clrMapOvr>
-    <a:masterClrMapping/>
-  </p:clrMapOvr>
-</p:notes>
-</file>
-
-<file path=ppt/notesSlides/notesSlide8.xml><?xml version="1.0" encoding="utf-8"?>
-<p:notes xmlns:a="http://schemas.openxmlformats.org/drawingml/2006/main" xmlns:p="http://schemas.openxmlformats.org/presentationml/2006/main" xmlns:r="http://schemas.openxmlformats.org/officeDocument/2006/relationships">
-  <p:cSld>
-    <p:spTree>
-      <p:nvGrpSpPr>
-        <p:cNvPr id="1" name=""/>
-        <p:cNvGrpSpPr/>
-        <p:nvPr/>
-      </p:nvGrpSpPr>
-      <p:grpSpPr>
-        <a:xfrm>
-          <a:off x="0" y="0"/>
-          <a:ext cx="0" cy="0"/>
-          <a:chOff x="0" y="0"/>
-          <a:chExt cx="0" cy="0"/>
-        </a:xfrm>
-      </p:grpSpPr>
-      <p:sp>
-        <p:nvSpPr>
-          <p:cNvPr id="2" name="讲课提示"/>
-          <p:cNvSpPr txBox="1"/>
-          <p:nvPr/>
-        </p:nvSpPr>
-        <p:spPr>
-          <a:xfrm>
-            <a:off x="457200" y="457200"/>
-            <a:ext cx="6858000" cy="4800600"/>
-          </a:xfrm>
-          <a:prstGeom prst="rect">
-            <a:avLst/>
-          </a:prstGeom>
-        </p:spPr>
-        <p:txBody>
-          <a:bodyPr wrap="square"/>
-          <a:lstStyle/>
-          <a:p>
-            <a:r>
-              <a:rPr lang="zh-CN" dirty="0"/>
-              <a:t>第 22 节 · 动手实战、答案与验收</a:t>
-            </a:r>
-          </a:p>
-          <a:p>
-            <a:r>
-              <a:rPr lang="zh-CN" dirty="0"/>
-              <a:t>单元 4 · if 语句 · W4</a:t>
-            </a:r>
-          </a:p>
-          <a:p>
-            <a:r>
-              <a:rPr lang="zh-CN" dirty="0"/>
-              <a:t/>
-            </a:r>
-          </a:p>
-          <a:p>
-            <a:r>
-              <a:rPr lang="zh-CN" dirty="0"/>
-              <a:t>学习目标：独立完成单元 4 练习，确认条件判断全部过关</a:t>
-            </a:r>
-          </a:p>
-          <a:p>
-            <a:r>
-              <a:rPr lang="zh-CN" dirty="0"/>
-              <a:t/>
-            </a:r>
-          </a:p>
-          <a:p>
-            <a:r>
-              <a:rPr lang="zh-CN" dirty="0"/>
-              <a:t>课堂实操（40 分钟，不看答案）：</a:t>
-            </a:r>
-          </a:p>
-          <a:p>
-            <a:r>
-              <a:rPr lang="zh-CN" dirty="0"/>
-              <a:t>· 限时 25 分钟独立完成基础档</a:t>
-            </a:r>
-          </a:p>
-          <a:p>
-            <a:r>
-              <a:rPr lang="zh-CN" dirty="0"/>
-              <a:t>· 逐条打勾验收自测</a:t>
-            </a:r>
-          </a:p>
-          <a:p>
-            <a:r>
-              <a:rPr lang="zh-CN" dirty="0"/>
-              <a:t/>
-            </a:r>
-          </a:p>
-          <a:p>
-            <a:r>
-              <a:rPr lang="zh-CN" dirty="0"/>
-              <a:t>课后作业：</a:t>
-            </a:r>
-          </a:p>
-          <a:p>
-            <a:r>
-              <a:rPr lang="zh-CN" dirty="0"/>
-              <a:t>· 产出：3 个条件判断小程序</a:t>
-            </a:r>
-          </a:p>
-          <a:p>
-            <a:r>
-              <a:rPr lang="zh-CN" dirty="0"/>
-              <a:t>· 完成本单元小结与产出检查</a:t>
-            </a:r>
-          </a:p>
-          <a:p>
-            <a:r>
-              <a:rPr lang="zh-CN" dirty="0"/>
-              <a:t/>
-            </a:r>
-          </a:p>
-          <a:p>
-            <a:r>
-              <a:rPr lang="zh-CN" dirty="0"/>
-              <a:t>节奏：讲 20 分钟 → 学员自己敲 40 分钟（不看答案）→ 对讲评自查 20 分钟 → 写作业 10 分钟。</a:t>
-            </a:r>
-          </a:p>
-        </p:txBody>
-      </p:sp>
-    </p:spTree>
-  </p:cSld>
-  <p:clrMapOvr>
-    <a:masterClrMapping/>
-  </p:clrMapOvr>
-</p:notes>
-</file>
-
-<file path=ppt/notesSlides/notesSlide9.xml><?xml version="1.0" encoding="utf-8"?>
-<p:notes xmlns:a="http://schemas.openxmlformats.org/drawingml/2006/main" xmlns:p="http://schemas.openxmlformats.org/presentationml/2006/main" xmlns:r="http://schemas.openxmlformats.org/officeDocument/2006/relationships">
-  <p:cSld>
-    <p:spTree>
-      <p:nvGrpSpPr>
-        <p:cNvPr id="1" name=""/>
-        <p:cNvGrpSpPr/>
-        <p:nvPr/>
-      </p:nvGrpSpPr>
-      <p:grpSpPr>
-        <a:xfrm>
-          <a:off x="0" y="0"/>
-          <a:ext cx="0" cy="0"/>
-          <a:chOff x="0" y="0"/>
-          <a:chExt cx="0" cy="0"/>
-        </a:xfrm>
-      </p:grpSpPr>
-      <p:sp>
-        <p:nvSpPr>
-          <p:cNvPr id="2" name="讲课提示"/>
-          <p:cNvSpPr txBox="1"/>
-          <p:nvPr/>
-        </p:nvSpPr>
-        <p:spPr>
-          <a:xfrm>
-            <a:off x="457200" y="457200"/>
-            <a:ext cx="6858000" cy="4800600"/>
-          </a:xfrm>
-          <a:prstGeom prst="rect">
-            <a:avLst/>
-          </a:prstGeom>
-        </p:spPr>
-        <p:txBody>
-          <a:bodyPr wrap="square"/>
-          <a:lstStyle/>
-          <a:p>
-            <a:r>
-              <a:rPr lang="zh-CN" dirty="0"/>
-              <a:t>第 22 节 · 核心知识点：动手实战、答案与验收</a:t>
-            </a:r>
-          </a:p>
-          <a:p>
-            <a:r>
-              <a:rPr lang="zh-CN" dirty="0"/>
-              <a:t/>
-            </a:r>
-          </a:p>
-          <a:p>
-            <a:r>
-              <a:rPr lang="zh-CN" dirty="0"/>
-              <a:t>讲这一页时：先让学生说出上节课的结论，再逐块讲要点。</a:t>
-            </a:r>
-          </a:p>
-          <a:p>
-            <a:r>
-              <a:rPr lang="zh-CN" dirty="0"/>
-              <a:t>每讲完一块，问一句「这一步如果写错了，报错会长什么样？」——把错误提前讲。</a:t>
-            </a:r>
-          </a:p>
-          <a:p>
-            <a:r>
-              <a:rPr lang="zh-CN" dirty="0"/>
-              <a:t/>
-            </a:r>
-          </a:p>
-          <a:p>
-            <a:r>
-              <a:rPr lang="zh-CN" dirty="0"/>
-              <a:t>本节目标：独立完成单元 4 练习，确认条件判断全部过关</a:t>
-            </a:r>
-          </a:p>
-          <a:p>
-            <a:r>
-              <a:rPr lang="zh-CN" dirty="0"/>
-              <a:t/>
-            </a:r>
-          </a:p>
-          <a:p>
-            <a:r>
-              <a:rPr lang="zh-CN" dirty="0"/>
-              <a:t>看不到懂的地方，回讲义对应小节读一遍，再回来对着这页复述一次——能讲出来才算真懂。</a:t>
-            </a:r>
-          </a:p>
-        </p:txBody>
-      </p:sp>
-    </p:spTree>
-  </p:cSld>
-  <p:clrMapOvr>
-    <a:masterClrMapping/>
-  </p:clrMapOvr>
-</p:notes>
 </file>
 
 <file path=ppt/slideLayouts/slideLayout1.xml><?xml version="1.0" encoding="utf-8"?>

--- a/python-course-ppt/逐节课件/Python讲授课件-单元04.pptx
+++ b/python-course-ppt/逐节课件/Python讲授课件-单元04.pptx
@@ -1677,7 +1677,7 @@
   <p:cSld>
     <p:spTree>
       <p:nvGrpSpPr>
-        <p:cNvPr id="29" name="" descr="&lt;Slide style={{ width: '1280px', height: '720px', backgroundColor: '#FAFCFE', padding: 0, position: 'relative', overflow: 'hidden' }}&gt;&#13;&#10;    &lt;Box style={{ position: 'absolute', left: 64, top: 36, width: '1152px', flexDirection: 'row', alignItems: 'center', gap: 12 }}&gt;&#13;&#10;        &lt;Box style={{ background: '#0E9B78', borderRadius: 5, padding: '3px 11px' }}&gt;&#13;&#10;            &lt;Text style={{ fontSize: 14, fontWeight: 'bold', color: '#FFFFFF' }}&gt;第 19 节&lt;/Text&gt;&#13;&#10;        &lt;/Box&gt;&#13;&#10;        &lt;Text style={{ fontSize: 30, fontWeight: 'bold', color: '#16232E' }}&gt;核心知识点&lt;/Text&gt;&#13;&#10;        &lt;Text style={{ fontSize: 15, color: '#5A6B7A', marginTop: 10 }}&gt;· 条件测试与比较运算&lt;/Text&gt;&#13;&#10;    &lt;/Box&gt;&#13;&#10;    &lt;Box style={{ position: 'absolute', left: 0, top: 0, width: '1280px', height: '720px' }}&gt;&#13;&#10;        &lt;svg width='1280' height='720' viewBox='0 0 1280 720'&gt;&#13;&#10;            &lt;rect x='64' y='96' width='548' height='330' rx='12' fill='#FFFFFF' stroke='#D8E3EE' /&gt;&lt;rect x='64' y='96' width='548' height='4' rx='2' fill='#1F5FA8' /&gt;&lt;text x='82' y='130' fontSize='15.5' fontWeight='bold' fill='#1F5FA8' textAnchor='start' fontFamily='Microsoft YaHei'&gt;2.1 条件测试：一个只能回答是/否的问题&lt;/text&gt;&lt;text x='82' y='169.0' fontSize='13' fill='#3A4A58' textAnchor='start' fontFamily='Microsoft YaHei'&gt;· 最常见的语法错误：把 == 写成 =。&lt;/text&gt;&lt;rect x='668' y='96' width='548' height='330' rx='12' fill='#FFFFFF' stroke='#D8E3EE' /&gt;&lt;rect x='668' y='96' width='548' height='4' rx='2' fill='#1F5FA8' /&gt;&lt;text x='686' y='130' fontSize='15.5' fontWeight='bold' fill='#1F5FA8' textAnchor='start' fontFamily='Microsoft YaHei'&gt;2.2 六个比较运算符&lt;/text&gt;&lt;text x='686' y='169.0' fontSize='13' fill='#3A4A58' textAnchor='start' fontFamily='Microsoft YaHei'&gt;· 字符串也能比较：Python 按字符编码逐个比较，所以可以按字母排序：&lt;/text&gt;&lt;rect x='64' y='574' width='1152' height='66' rx='12' fill='#EEF5FB' /&gt;&lt;text x='84' y='616' fontSize='14' fill='#243444' textAnchor='start' fontFamily='Microsoft YaHei'&gt;看不懂的地方先回讲义对应小节读一遍，再回来对着这页复述一次——能讲出来才算真懂。&lt;/text&gt;&#13;&#10;            &lt;text x='64' y='684' fontSize='13' fill='#8A9AAA' fontFamily='Microsoft YaHei'&gt;Python 讲授课件 · 逐节版&lt;/text&gt;&#13;&#10;            &lt;text x='1216' y='684' fontSize='13' fill='#8A9AAA' textAnchor='end' fontFamily='Microsoft YaHei'&gt;单元 4 · 第 19 节&lt;/text&gt;&#13;&#10;        &lt;/svg&gt;&#13;&#10;    &lt;/Box&gt;&#13;&#10;&lt;/Slide&gt;&#13;&#10;"/>
+        <p:cNvPr id="29" name="" descr="&lt;Slide style={{ width: '1280px', height: '720px', backgroundColor: '#FAFCFE', padding: 0, position: 'relative', overflow: 'hidden' }}&gt;&#13;&#10;    &lt;Box style={{ position: 'absolute', left: 64, top: 36, width: '1152px', flexDirection: 'row', alignItems: 'center', gap: 12 }}&gt;&#13;&#10;        &lt;Box style={{ background: '#0E9B78', borderRadius: 5, padding: '3px 11px' }}&gt;&#13;&#10;            &lt;Text style={{ fontSize: 14, fontWeight: 'bold', color: '#FFFFFF' }}&gt;第 19 节&lt;/Text&gt;&#13;&#10;        &lt;/Box&gt;&#13;&#10;        &lt;Text style={{ fontSize: 30, fontWeight: 'bold', color: '#16232E' }}&gt;核心知识点&lt;/Text&gt;&#13;&#10;        &lt;Text style={{ fontSize: 15, color: '#5A6B7A', marginTop: 10 }}&gt;· 条件测试与比较运算&lt;/Text&gt;&#13;&#10;    &lt;/Box&gt;&#13;&#10;    &lt;Box style={{ position: 'absolute', left: 0, top: 0, width: '1280px', height: '720px' }}&gt;&#13;&#10;        &lt;svg width='1280' height='720' viewBox='0 0 1280 720'&gt;&#13;&#10;            &lt;rect x='64' y='96' width='548' height='330' rx='12' fill='#FFFFFF' stroke='#D8E3EE' /&gt;&lt;rect x='64' y='96' width='548' height='4' rx='2' fill='#1F5FA8' /&gt;&lt;text x='82' y='130' fontSize='15.5' fontWeight='bold' fill='#1F5FA8' textAnchor='start' fontFamily='Microsoft YaHei'&gt;2.1 条件测试：一个只能回答是/否的问题&lt;/text&gt;&lt;text x='82' y='169.0' fontSize='13' fill='#3A4A58' textAnchor='start' fontFamily='Microsoft YaHei'&gt;· 最常见的语法错误：把 == 写成 =。&lt;/text&gt;&lt;rect x='668' y='96' width='548' height='330' rx='12' fill='#FFFFFF' stroke='#D8E3EE' /&gt;&lt;rect x='668' y='96' width='548' height='4' rx='2' fill='#1F5FA8' /&gt;&lt;text x='686' y='130' fontSize='15.5' fontWeight='bold' fill='#1F5FA8' textAnchor='start' fontFamily='Microsoft YaHei'&gt;2.2 六个比较运算符&lt;/text&gt;&lt;text x='686' y='169.0' fontSize='13' fill='#3A4A58' textAnchor='start' fontFamily='Microsoft YaHei'&gt;· 字符串也能比较&lt;/text&gt;&lt;rect x='64' y='574' width='1152' height='66' rx='12' fill='#EEF5FB' /&gt;&lt;text x='84' y='616' fontSize='14' fill='#243444' textAnchor='start' fontFamily='Microsoft YaHei'&gt;看不懂的地方先回讲义对应小节读一遍，再回来对着这页复述一次——能讲出来才算真懂。&lt;/text&gt;&#13;&#10;            &lt;text x='64' y='684' fontSize='13' fill='#8A9AAA' fontFamily='Microsoft YaHei'&gt;Python 讲授课件 · 逐节版&lt;/text&gt;&#13;&#10;            &lt;text x='1216' y='684' fontSize='13' fill='#8A9AAA' textAnchor='end' fontFamily='Microsoft YaHei'&gt;单元 4 · 第 19 节&lt;/text&gt;&#13;&#10;        &lt;/svg&gt;&#13;&#10;    &lt;/Box&gt;&#13;&#10;&lt;/Slide&gt;&#13;&#10;"/>
         <p:cNvGrpSpPr/>
         <p:nvPr/>
       </p:nvGrpSpPr>
@@ -2108,7 +2108,7 @@
   <p:cSld>
     <p:spTree>
       <p:nvGrpSpPr>
-        <p:cNvPr id="42" name="" descr="&lt;Slide style={{ width: '1280px', height: '720px', backgroundColor: '#FAFCFE', padding: 0, position: 'relative', overflow: 'hidden' }}&gt;&#13;&#10;    &lt;Box style={{ position: 'absolute', left: 64, top: 36, width: '1152px', flexDirection: 'row', alignItems: 'center', gap: 12 }}&gt;&#13;&#10;        &lt;Box style={{ background: '#0E9B78', borderRadius: 5, padding: '3px 11px' }}&gt;&#13;&#10;            &lt;Text style={{ fontSize: 14, fontWeight: 'bold', color: '#FFFFFF' }}&gt;第 20 节&lt;/Text&gt;&#13;&#10;        &lt;/Box&gt;&#13;&#10;        &lt;Text style={{ fontSize: 30, fontWeight: 'bold', color: '#16232E' }}&gt;核心知识点&lt;/Text&gt;&#13;&#10;        &lt;Text style={{ fontSize: 15, color: '#5A6B7A', marginTop: 10 }}&gt;· 三分支结构与逻辑运算符&lt;/Text&gt;&#13;&#10;    &lt;/Box&gt;&#13;&#10;    &lt;Box style={{ position: 'absolute', left: 0, top: 0, width: '1280px', height: '720px' }}&gt;&#13;&#10;        &lt;svg width='1280' height='720' viewBox='0 0 1280 720'&gt;&#13;&#10;            &lt;rect x='64' y='96' width='548' height='330' rx='12' fill='#FFFFFF' stroke='#D8E3EE' /&gt;&lt;rect x='64' y='96' width='548' height='4' rx='2' fill='#1F5FA8' /&gt;&lt;text x='82' y='130' fontSize='15.5' fontWeight='bold' fill='#1F5FA8' textAnchor='start' fontFamily='Microsoft YaHei'&gt;2.3 三分支结构：if / elif / else&lt;/text&gt;&lt;text x='82' y='169.0' fontSize='13' fill='#3A4A58' textAnchor='start' fontFamily='Microsoft YaHei'&gt;· 三条规则，务必记牢：&lt;/text&gt;&lt;text x='82' y='197.5' fontSize='13' fill='#3A4A58' textAnchor='start' fontFamily='Microsoft YaHei'&gt;· 顺序为什么重要——这是本单元最核心的洞察：&lt;/text&gt;&lt;rect x='668' y='96' width='548' height='330' rx='12' fill='#FFFFFF' stroke='#D8E3EE' /&gt;&lt;rect x='668' y='96' width='548' height='4' rx='2' fill='#1F5FA8' /&gt;&lt;text x='686' y='130' fontSize='15.5' fontWeight='bold' fill='#1F5FA8' textAnchor='start' fontFamily='Microsoft YaHei'&gt;2.4 逻辑运算符：把条件组合起来&lt;/text&gt;&lt;text x='686' y='169.0' fontSize='13' fill='#3A4A58' textAnchor='start' fontFamily='Microsoft YaHei'&gt;· and：两边都为真才为真&lt;/text&gt;&lt;text x='686' y='197.5' fontSize='13' fill='#3A4A58' textAnchor='start' fontFamily='Microsoft YaHei'&gt;· or：两边有一个为真就为真&lt;/text&gt;&lt;text x='686' y='226.0' fontSize='13' fill='#3A4A58' textAnchor='start' fontFamily='Microsoft YaHei'&gt;· not：取反&lt;/text&gt;&lt;rect x='64' y='574' width='1152' height='66' rx='12' fill='#EEF5FB' /&gt;&lt;text x='84' y='616' fontSize='14' fill='#243444' textAnchor='start' fontFamily='Microsoft YaHei'&gt;看不懂的地方先回讲义对应小节读一遍，再回来对着这页复述一次——能讲出来才算真懂。&lt;/text&gt;&#13;&#10;            &lt;text x='64' y='684' fontSize='13' fill='#8A9AAA' fontFamily='Microsoft YaHei'&gt;Python 讲授课件 · 逐节版&lt;/text&gt;&#13;&#10;            &lt;text x='1216' y='684' fontSize='13' fill='#8A9AAA' textAnchor='end' fontFamily='Microsoft YaHei'&gt;单元 4 · 第 20 节&lt;/text&gt;&#13;&#10;        &lt;/svg&gt;&#13;&#10;    &lt;/Box&gt;&#13;&#10;&lt;/Slide&gt;&#13;&#10;"/>
+        <p:cNvPr id="42" name="" descr="&lt;Slide style={{ width: '1280px', height: '720px', backgroundColor: '#FAFCFE', padding: 0, position: 'relative', overflow: 'hidden' }}&gt;&#13;&#10;    &lt;Box style={{ position: 'absolute', left: 64, top: 36, width: '1152px', flexDirection: 'row', alignItems: 'center', gap: 12 }}&gt;&#13;&#10;        &lt;Box style={{ background: '#0E9B78', borderRadius: 5, padding: '3px 11px' }}&gt;&#13;&#10;            &lt;Text style={{ fontSize: 14, fontWeight: 'bold', color: '#FFFFFF' }}&gt;第 20 节&lt;/Text&gt;&#13;&#10;        &lt;/Box&gt;&#13;&#10;        &lt;Text style={{ fontSize: 30, fontWeight: 'bold', color: '#16232E' }}&gt;核心知识点&lt;/Text&gt;&#13;&#10;        &lt;Text style={{ fontSize: 15, color: '#5A6B7A', marginTop: 10 }}&gt;· 三分支结构与逻辑运算符&lt;/Text&gt;&#13;&#10;    &lt;/Box&gt;&#13;&#10;    &lt;Box style={{ position: 'absolute', left: 0, top: 0, width: '1280px', height: '720px' }}&gt;&#13;&#10;        &lt;svg width='1280' height='720' viewBox='0 0 1280 720'&gt;&#13;&#10;            &lt;rect x='64' y='96' width='548' height='330' rx='12' fill='#FFFFFF' stroke='#D8E3EE' /&gt;&lt;rect x='64' y='96' width='548' height='4' rx='2' fill='#1F5FA8' /&gt;&lt;text x='82' y='130' fontSize='15.5' fontWeight='bold' fill='#1F5FA8' textAnchor='start' fontFamily='Microsoft YaHei'&gt;2.3 三分支结构：if / elif / else&lt;/text&gt;&lt;text x='82' y='169.0' fontSize='13' fill='#3A4A58' textAnchor='start' fontFamily='Microsoft YaHei'&gt;· 三条规则，务必记牢：&lt;/text&gt;&lt;text x='82' y='197.5' fontSize='13' fill='#3A4A58' textAnchor='start' fontFamily='Microsoft YaHei'&gt;· 顺序为什么重要&lt;/text&gt;&lt;rect x='668' y='96' width='548' height='330' rx='12' fill='#FFFFFF' stroke='#D8E3EE' /&gt;&lt;rect x='668' y='96' width='548' height='4' rx='2' fill='#1F5FA8' /&gt;&lt;text x='686' y='130' fontSize='15.5' fontWeight='bold' fill='#1F5FA8' textAnchor='start' fontFamily='Microsoft YaHei'&gt;2.4 逻辑运算符：把条件组合起来&lt;/text&gt;&lt;text x='686' y='169.0' fontSize='13' fill='#3A4A58' textAnchor='start' fontFamily='Microsoft YaHei'&gt;· and：两边都为真才为真&lt;/text&gt;&lt;text x='686' y='197.5' fontSize='13' fill='#3A4A58' textAnchor='start' fontFamily='Microsoft YaHei'&gt;· or：两边有一个为真就为真&lt;/text&gt;&lt;text x='686' y='226.0' fontSize='13' fill='#3A4A58' textAnchor='start' fontFamily='Microsoft YaHei'&gt;· not：取反&lt;/text&gt;&lt;rect x='64' y='574' width='1152' height='66' rx='12' fill='#EEF5FB' /&gt;&lt;text x='84' y='616' fontSize='14' fill='#243444' textAnchor='start' fontFamily='Microsoft YaHei'&gt;看不懂的地方先回讲义对应小节读一遍，再回来对着这页复述一次——能讲出来才算真懂。&lt;/text&gt;&#13;&#10;            &lt;text x='64' y='684' fontSize='13' fill='#8A9AAA' fontFamily='Microsoft YaHei'&gt;Python 讲授课件 · 逐节版&lt;/text&gt;&#13;&#10;            &lt;text x='1216' y='684' fontSize='13' fill='#8A9AAA' textAnchor='end' fontFamily='Microsoft YaHei'&gt;单元 4 · 第 20 节&lt;/text&gt;&#13;&#10;        &lt;/svg&gt;&#13;&#10;    &lt;/Box&gt;&#13;&#10;&lt;/Slide&gt;&#13;&#10;"/>
         <p:cNvGrpSpPr/>
         <p:nvPr/>
       </p:nvGrpSpPr>
@@ -2559,7 +2559,7 @@
   <p:cSld>
     <p:spTree>
       <p:nvGrpSpPr>
-        <p:cNvPr id="55" name="" descr="&lt;Slide style={{ width: '1280px', height: '720px', backgroundColor: '#FAFCFE', padding: 0, position: 'relative', overflow: 'hidden' }}&gt;&#13;&#10;    &lt;Box style={{ position: 'absolute', left: 64, top: 36, width: '1152px', flexDirection: 'row', alignItems: 'center', gap: 12 }}&gt;&#13;&#10;        &lt;Box style={{ background: '#0E9B78', borderRadius: 5, padding: '3px 11px' }}&gt;&#13;&#10;            &lt;Text style={{ fontSize: 14, fontWeight: 'bold', color: '#FFFFFF' }}&gt;第 21 节&lt;/Text&gt;&#13;&#10;        &lt;/Box&gt;&#13;&#10;        &lt;Text style={{ fontSize: 30, fontWeight: 'bold', color: '#16232E' }}&gt;核心知识点&lt;/Text&gt;&#13;&#10;        &lt;Text style={{ fontSize: 15, color: '#5A6B7A', marginTop: 10 }}&gt;· 链式比较、is 与条件表达式&lt;/Text&gt;&#13;&#10;    &lt;/Box&gt;&#13;&#10;    &lt;Box style={{ position: 'absolute', left: 0, top: 0, width: '1280px', height: '720px' }}&gt;&#13;&#10;        &lt;svg width='1280' height='720' viewBox='0 0 1280 720'&gt;&#13;&#10;            &lt;rect x='64' y='96' width='368' height='330' rx='12' fill='#FFFFFF' stroke='#D8E3EE' /&gt;&lt;rect x='64' y='96' width='368' height='4' rx='2' fill='#1F5FA8' /&gt;&lt;text x='82' y='130' fontSize='15.5' fontWeight='bold' fill='#1F5FA8' textAnchor='start' fontFamily='Microsoft YaHei'&gt;2.5 链式比较：Python 的贴心语法&lt;/text&gt;&lt;text x='82' y='169.0' fontSize='13' fill='#3A4A58' textAnchor='start' fontFamily='Microsoft YaHei'&gt;· Python 支持把比较串起来写，像数学一样：&lt;/text&gt;&lt;rect x='468' y='96' width='368' height='330' rx='12' fill='#FFFFFF' stroke='#D8E3EE' /&gt;&lt;rect x='468' y='96' width='368' height='4' rx='2' fill='#1F5FA8' /&gt;&lt;text x='486' y='130' fontSize='15.5' fontWeight='bold' fill='#1F5FA8' textAnchor='start' fontFamily='Microsoft YaHei'&gt;2.6 == 还是 is？&lt;/text&gt;&lt;text x='486' y='169.0' fontSize='13' fill='#3A4A58' textAnchor='start' fontFamily='Microsoft YaHei'&gt;· 为什么不用 if result == None？ 因为 None 只可能&lt;/text&gt;&lt;text x='486' y='188.5' fontSize='13' fill='#3A4A58' textAnchor='start' fontFamily='Microsoft YaHei'&gt;是那一个对象，is None…&lt;/text&gt;&lt;rect x='872' y='96' width='368' height='330' rx='12' fill='#FFFFFF' stroke='#D8E3EE' /&gt;&lt;rect x='872' y='96' width='368' height='4' rx='2' fill='#1F5FA8' /&gt;&lt;text x='890' y='130' fontSize='15.5' fontWeight='bold' fill='#1F5FA8' textAnchor='start' fontFamily='Microsoft YaHei'&gt;2.7 条件表达式：把 5 行压成 1 行&lt;/text&gt;&lt;text x='890' y='169.0' fontSize='13' fill='#3A4A58' textAnchor='start' fontFamily='Microsoft YaHei'&gt;· if age ＞= 18:&lt;/text&gt;&lt;text x='64' y='470' fontSize='14.5' fontWeight='bold' fill='#0E9B78' textAnchor='start' fontFamily='Microsoft YaHei'&gt;本节的代码示例&lt;/text&gt;&lt;text x='64' y='500' fontSize='13' fill='#3A4A58' textAnchor='start' fontFamily='Microsoft YaHei'&gt;· if 单分支&lt;/text&gt;&lt;text x='468' y='500' fontSize='13' fill='#3A4A58' textAnchor='start' fontFamily='Microsoft YaHei'&gt;· if / elif / else 三分支&lt;/text&gt;&lt;text x='872' y='500' fontSize='13' fill='#3A4A58' textAnchor='start' fontFamily='Microsoft YaHei'&gt;· 顺序的重要性&lt;/text&gt;&lt;rect x='64' y='574' width='1152' height='66' rx='12' fill='#EEF5FB' /&gt;&lt;text x='84' y='616' fontSize='14' fill='#243444' textAnchor='start' fontFamily='Microsoft YaHei'&gt;看不懂的地方先回讲义对应小节读一遍，再回来对着这页复述一次——能讲出来才算真懂。&lt;/text&gt;&#13;&#10;            &lt;text x='64' y='684' fontSize='13' fill='#8A9AAA' fontFamily='Microsoft YaHei'&gt;Python 讲授课件 · 逐节版&lt;/text&gt;&#13;&#10;            &lt;text x='1216' y='684' fontSize='13' fill='#8A9AAA' textAnchor='end' fontFamily='Microsoft YaHei'&gt;单元 4 · 第 21 节&lt;/text&gt;&#13;&#10;        &lt;/svg&gt;&#13;&#10;    &lt;/Box&gt;&#13;&#10;&lt;/Slide&gt;&#13;&#10;"/>
+        <p:cNvPr id="55" name="" descr="&lt;Slide style={{ width: '1280px', height: '720px', backgroundColor: '#FAFCFE', padding: 0, position: 'relative', overflow: 'hidden' }}&gt;&#13;&#10;    &lt;Box style={{ position: 'absolute', left: 64, top: 36, width: '1152px', flexDirection: 'row', alignItems: 'center', gap: 12 }}&gt;&#13;&#10;        &lt;Box style={{ background: '#0E9B78', borderRadius: 5, padding: '3px 11px' }}&gt;&#13;&#10;            &lt;Text style={{ fontSize: 14, fontWeight: 'bold', color: '#FFFFFF' }}&gt;第 21 节&lt;/Text&gt;&#13;&#10;        &lt;/Box&gt;&#13;&#10;        &lt;Text style={{ fontSize: 30, fontWeight: 'bold', color: '#16232E' }}&gt;核心知识点&lt;/Text&gt;&#13;&#10;        &lt;Text style={{ fontSize: 15, color: '#5A6B7A', marginTop: 10 }}&gt;· 链式比较、is 与条件表达式&lt;/Text&gt;&#13;&#10;    &lt;/Box&gt;&#13;&#10;    &lt;Box style={{ position: 'absolute', left: 0, top: 0, width: '1280px', height: '720px' }}&gt;&#13;&#10;        &lt;svg width='1280' height='720' viewBox='0 0 1280 720'&gt;&#13;&#10;            &lt;rect x='64' y='96' width='368' height='330' rx='12' fill='#FFFFFF' stroke='#D8E3EE' /&gt;&lt;rect x='64' y='96' width='368' height='4' rx='2' fill='#1F5FA8' /&gt;&lt;text x='82' y='130' fontSize='15.5' fontWeight='bold' fill='#1F5FA8' textAnchor='start' fontFamily='Microsoft YaHei'&gt;2.5 链式比较：Python 的贴心语法&lt;/text&gt;&lt;text x='82' y='169.0' fontSize='13' fill='#3A4A58' textAnchor='start' fontFamily='Microsoft YaHei'&gt;· Python 支持把比较串起来写，像数学一样：&lt;/text&gt;&lt;rect x='468' y='96' width='368' height='330' rx='12' fill='#FFFFFF' stroke='#D8E3EE' /&gt;&lt;rect x='468' y='96' width='368' height='4' rx='2' fill='#1F5FA8' /&gt;&lt;text x='486' y='130' fontSize='15.5' fontWeight='bold' fill='#1F5FA8' textAnchor='start' fontFamily='Microsoft YaHei'&gt;2.6 == 还是 is？&lt;/text&gt;&lt;text x='486' y='169.0' fontSize='13' fill='#3A4A58' textAnchor='start' fontFamily='Microsoft YaHei'&gt;· 为什么不用 if result == None？&lt;/text&gt;&lt;rect x='872' y='96' width='368' height='330' rx='12' fill='#FFFFFF' stroke='#D8E3EE' /&gt;&lt;rect x='872' y='96' width='368' height='4' rx='2' fill='#1F5FA8' /&gt;&lt;text x='890' y='130' fontSize='15.5' fontWeight='bold' fill='#1F5FA8' textAnchor='start' fontFamily='Microsoft YaHei'&gt;2.7 条件表达式：把 5 行压成 1 行&lt;/text&gt;&lt;text x='890' y='169.0' fontSize='13' fill='#3A4A58' textAnchor='start' fontFamily='Microsoft YaHei'&gt;· if age ＞= 18:&lt;/text&gt;&lt;text x='64' y='470' fontSize='14.5' fontWeight='bold' fill='#0E9B78' textAnchor='start' fontFamily='Microsoft YaHei'&gt;本节的代码示例&lt;/text&gt;&lt;text x='64' y='500' fontSize='13' fill='#3A4A58' textAnchor='start' fontFamily='Microsoft YaHei'&gt;· if 单分支&lt;/text&gt;&lt;text x='468' y='500' fontSize='13' fill='#3A4A58' textAnchor='start' fontFamily='Microsoft YaHei'&gt;· if / elif / else 三分支&lt;/text&gt;&lt;text x='872' y='500' fontSize='13' fill='#3A4A58' textAnchor='start' fontFamily='Microsoft YaHei'&gt;· 顺序的重要性&lt;/text&gt;&lt;rect x='64' y='574' width='1152' height='66' rx='12' fill='#EEF5FB' /&gt;&lt;text x='84' y='616' fontSize='14' fill='#243444' textAnchor='start' fontFamily='Microsoft YaHei'&gt;看不懂的地方先回讲义对应小节读一遍，再回来对着这页复述一次——能讲出来才算真懂。&lt;/text&gt;&#13;&#10;            &lt;text x='64' y='684' fontSize='13' fill='#8A9AAA' fontFamily='Microsoft YaHei'&gt;Python 讲授课件 · 逐节版&lt;/text&gt;&#13;&#10;            &lt;text x='1216' y='684' fontSize='13' fill='#8A9AAA' textAnchor='end' fontFamily='Microsoft YaHei'&gt;单元 4 · 第 21 节&lt;/text&gt;&#13;&#10;        &lt;/svg&gt;&#13;&#10;    &lt;/Box&gt;&#13;&#10;&lt;/Slide&gt;&#13;&#10;"/>
         <p:cNvGrpSpPr/>
         <p:nvPr/>
       </p:nvGrpSpPr>

--- a/python-course-ppt/逐节课件/Python讲授课件-单元04.pptx
+++ b/python-course-ppt/逐节课件/Python讲授课件-单元04.pptx
@@ -553,7 +553,7 @@
   <p:cSld>
     <p:spTree>
       <p:nvGrpSpPr>
-        <p:cNvPr id="1" name="" descr="&lt;Slide style={{ width: '1280px', height: '720px', backgroundColor: '#FAFCFE', padding: 0, position: 'relative', overflow: 'hidden' }}&gt;&#13;&#10;    &lt;Box style={{ position: 'absolute', left: 0, top: 0, width: '1280px', height: '150px', background: '#1F5FA8' }} /&gt;&#13;&#10;    &lt;Box style={{ position: 'absolute', left: 64, top: 34, width: '1152px', flexDirection: 'column' }}&gt;&#13;&#10;        &lt;Text style={{ fontSize: 15, fontWeight: 'bold', color: '#BFD9F2', letterSpacing: 2 }}&gt;阶段 1 · 单元 4&lt;/Text&gt;&#13;&#10;        &lt;Text style={{ fontSize: 38, fontWeight: 'bold', color: '#FFFFFF', marginTop: 6 }}&gt;if 语句&lt;/Text&gt;&#13;&#10;    &lt;/Box&gt;&#13;&#10;    &lt;Box style={{ position: 'absolute', left: 64, top: 168, width: '1152px', height: 470 }}&gt;&#13;&#10;        &lt;svg width='1152' height='470' viewBox='0 0 1152 470'&gt;&#13;&#10;            &lt;text x='0' y='18' fontSize='15' fontWeight='bold' fill='#16232E' fontFamily='Microsoft YaHei'&gt;本单元共 4 节课&lt;/text&gt;&#13;&#10;            &lt;rect x='0' y='196' width='1152' height='38' rx='7' fill='#FFFFFF' /&gt;&lt;text x='16' y='221' fontSize='15' fontWeight='bold' fill='#1F5FA8' fontFamily='Microsoft YaHei'&gt;第 19 节&lt;/text&gt;&lt;text x='96' y='221' fontSize='15' fill='#16232E' fontFamily='Microsoft YaHei'&gt;条件测试与比较运算&lt;/text&gt;&lt;text x='1080' y='221' fontSize='13' fill='#5A6B7A' textAnchor='end' fontFamily='Microsoft YaHei'&gt;W4&lt;/text&gt;&lt;rect x='0' y='238' width='1152' height='38' rx='7' fill='#F2F7FD' /&gt;&lt;text x='16' y='263' fontSize='15' fontWeight='bold' fill='#1F5FA8' fontFamily='Microsoft YaHei'&gt;第 20 节&lt;/text&gt;&lt;text x='96' y='263' fontSize='15' fill='#16232E' fontFamily='Microsoft YaHei'&gt;三分支结构与逻辑运算符&lt;/text&gt;&lt;text x='1080' y='263' fontSize='13' fill='#5A6B7A' textAnchor='end' fontFamily='Microsoft YaHei'&gt;W4&lt;/text&gt;&lt;rect x='0' y='280' width='1152' height='38' rx='7' fill='#FFFFFF' /&gt;&lt;text x='16' y='305' fontSize='15' fontWeight='bold' fill='#1F5FA8' fontFamily='Microsoft YaHei'&gt;第 21 节&lt;/text&gt;&lt;text x='96' y='305' fontSize='15' fill='#16232E' fontFamily='Microsoft YaHei'&gt;链式比较、is 与条件表达式&lt;/text&gt;&lt;text x='1080' y='305' fontSize='13' fill='#5A6B7A' textAnchor='end' fontFamily='Microsoft YaHei'&gt;W4&lt;/text&gt;&lt;rect x='0' y='322' width='1152' height='38' rx='7' fill='#F2F7FD' /&gt;&lt;text x='16' y='347' fontSize='15' fontWeight='bold' fill='#1F5FA8' fontFamily='Microsoft YaHei'&gt;第 22 节&lt;/text&gt;&lt;text x='96' y='347' fontSize='15' fill='#16232E' fontFamily='Microsoft YaHei'&gt;动手实战、答案与验收&lt;/text&gt;&lt;text x='1080' y='347' fontSize='13' fill='#5A6B7A' textAnchor='end' fontFamily='Microsoft YaHei'&gt;W4&lt;/text&gt;&#13;&#10;        &lt;/svg&gt;&#13;&#10;    &lt;/Box&gt;&#13;&#10;    &lt;Box style={{ position: 'absolute', left: 64, bottom: 22, width: '1152px', flexDirection: 'row', justifyContent: 'space-between' }}&gt;&#13;&#10;        &lt;Text style={{ fontSize: 13, color: '#8A9AAA' }}&gt;Python 讲授课件 · 逐节版&lt;/Text&gt;&#13;&#10;        &lt;Text style={{ fontSize: 13, color: '#8A9AAA' }}&gt;单元 4 · 封面&lt;/Text&gt;&#13;&#10;    &lt;/Box&gt;&#13;&#10;&lt;/Slide&gt;&#13;&#10;"/>
+        <p:cNvPr id="1" name="" descr="&lt;Slide style={{ width: '1280px', height: '720px', backgroundColor: '#FAFCFE', padding: 0, position: 'relative', overflow: 'hidden' }}&gt;&#13;&#10;    &lt;Box style={{ position: 'absolute', left: 0, top: 0, width: '1280px', height: '150px', background: '#1F5FA8' }} /&gt;&#13;&#10;    &lt;Box style={{ position: 'absolute', left: 64, top: 34, width: '1152px', flexDirection: 'column' }}&gt;&#13;&#10;        &lt;Text style={{ fontSize: 15, fontWeight: 'bold', color: '#BFD9F2', letterSpacing: 2 }}&gt;阶段 1 · 单元 4&lt;/Text&gt;&#13;&#10;        &lt;Text style={{ fontSize: 38, fontWeight: 'bold', color: '#FFFFFF', marginTop: 6 }}&gt;if 语句&lt;/Text&gt;&#13;&#10;    &lt;/Box&gt;&#13;&#10;    &lt;Box style={{ position: 'absolute', left: 64, top: 168, width: '1152px', height: 470 }}&gt;&#13;&#10;        &lt;svg width='1152' height='470' viewBox='0 0 1152 470'&gt;&#13;&#10;            &lt;text x='0' y='18' fontSize='15' fontWeight='bold' fill='#16232E' fontFamily='Microsoft YaHei'&gt;本单元共 4 节课&lt;/text&gt;&#13;&#10;            &lt;rect x='0' y='56.0' width='1152' height='48.0' rx='7' fill='#FFFFFF' /&gt;&lt;text x='16' y='85.0' fontSize='15' fontWeight='bold' fill='#1F5FA8' fontFamily='Microsoft YaHei'&gt;第 19 节&lt;/text&gt;&lt;text x='96' y='85.0' fontSize='15' fill='#16232E' fontFamily='Microsoft YaHei'&gt;条件测试与比较运算&lt;/text&gt;&lt;text x='1080' y='85.0' fontSize='13' fill='#5A6B7A' textAnchor='end' fontFamily='Microsoft YaHei'&gt;W4&lt;/text&gt;&lt;rect x='0' y='155.0' width='1152' height='48.0' rx='7' fill='#F2F7FD' /&gt;&lt;text x='16' y='184.0' fontSize='15' fontWeight='bold' fill='#1F5FA8' fontFamily='Microsoft YaHei'&gt;第 20 节&lt;/text&gt;&lt;text x='96' y='184.0' fontSize='15' fill='#16232E' fontFamily='Microsoft YaHei'&gt;三分支结构与逻辑运算符&lt;/text&gt;&lt;text x='1080' y='184.0' fontSize='13' fill='#5A6B7A' textAnchor='end' fontFamily='Microsoft YaHei'&gt;W4&lt;/text&gt;&lt;rect x='0' y='254.0' width='1152' height='48.0' rx='7' fill='#FFFFFF' /&gt;&lt;text x='16' y='283.0' fontSize='15' fontWeight='bold' fill='#1F5FA8' fontFamily='Microsoft YaHei'&gt;第 21 节&lt;/text&gt;&lt;text x='96' y='283.0' fontSize='15' fill='#16232E' fontFamily='Microsoft YaHei'&gt;链式比较、is 与条件表达式&lt;/text&gt;&lt;text x='1080' y='283.0' fontSize='13' fill='#5A6B7A' textAnchor='end' fontFamily='Microsoft YaHei'&gt;W4&lt;/text&gt;&lt;rect x='0' y='353.0' width='1152' height='48.0' rx='7' fill='#F2F7FD' /&gt;&lt;text x='16' y='382.0' fontSize='15' fontWeight='bold' fill='#1F5FA8' fontFamily='Microsoft YaHei'&gt;第 22 节&lt;/text&gt;&lt;text x='96' y='382.0' fontSize='15' fill='#16232E' fontFamily='Microsoft YaHei'&gt;动手实战、答案与验收&lt;/text&gt;&lt;text x='1080' y='382.0' fontSize='13' fill='#5A6B7A' textAnchor='end' fontFamily='Microsoft YaHei'&gt;W4&lt;/text&gt;&#13;&#10;        &lt;/svg&gt;&#13;&#10;    &lt;/Box&gt;&#13;&#10;    &lt;Box style={{ position: 'absolute', left: 64, bottom: 22, width: '1152px', flexDirection: 'row', justifyContent: 'space-between' }}&gt;&#13;&#10;        &lt;Text style={{ fontSize: 13, color: '#8A9AAA' }}&gt;Python 讲授课件 · 逐节版&lt;/Text&gt;&#13;&#10;        &lt;Text style={{ fontSize: 13, color: '#8A9AAA' }}&gt;单元 4 · 封面&lt;/Text&gt;&#13;&#10;    &lt;/Box&gt;&#13;&#10;&lt;/Slide&gt;&#13;&#10;"/>
         <p:cNvGrpSpPr/>
         <p:nvPr/>
       </p:nvGrpSpPr>
@@ -2108,7 +2108,7 @@
   <p:cSld>
     <p:spTree>
       <p:nvGrpSpPr>
-        <p:cNvPr id="42" name="" descr="&lt;Slide style={{ width: '1280px', height: '720px', backgroundColor: '#FAFCFE', padding: 0, position: 'relative', overflow: 'hidden' }}&gt;&#13;&#10;    &lt;Box style={{ position: 'absolute', left: 64, top: 36, width: '1152px', flexDirection: 'row', alignItems: 'center', gap: 12 }}&gt;&#13;&#10;        &lt;Box style={{ background: '#0E9B78', borderRadius: 5, padding: '3px 11px' }}&gt;&#13;&#10;            &lt;Text style={{ fontSize: 14, fontWeight: 'bold', color: '#FFFFFF' }}&gt;第 20 节&lt;/Text&gt;&#13;&#10;        &lt;/Box&gt;&#13;&#10;        &lt;Text style={{ fontSize: 30, fontWeight: 'bold', color: '#16232E' }}&gt;核心知识点&lt;/Text&gt;&#13;&#10;        &lt;Text style={{ fontSize: 15, color: '#5A6B7A', marginTop: 10 }}&gt;· 三分支结构与逻辑运算符&lt;/Text&gt;&#13;&#10;    &lt;/Box&gt;&#13;&#10;    &lt;Box style={{ position: 'absolute', left: 0, top: 0, width: '1280px', height: '720px' }}&gt;&#13;&#10;        &lt;svg width='1280' height='720' viewBox='0 0 1280 720'&gt;&#13;&#10;            &lt;rect x='64' y='96' width='548' height='330' rx='12' fill='#FFFFFF' stroke='#D8E3EE' /&gt;&lt;rect x='64' y='96' width='548' height='4' rx='2' fill='#1F5FA8' /&gt;&lt;text x='82' y='130' fontSize='15.5' fontWeight='bold' fill='#1F5FA8' textAnchor='start' fontFamily='Microsoft YaHei'&gt;2.3 三分支结构：if / elif / else&lt;/text&gt;&lt;text x='82' y='169.0' fontSize='13' fill='#3A4A58' textAnchor='start' fontFamily='Microsoft YaHei'&gt;· 三条规则，务必记牢：&lt;/text&gt;&lt;text x='82' y='197.5' fontSize='13' fill='#3A4A58' textAnchor='start' fontFamily='Microsoft YaHei'&gt;· 顺序为什么重要&lt;/text&gt;&lt;rect x='668' y='96' width='548' height='330' rx='12' fill='#FFFFFF' stroke='#D8E3EE' /&gt;&lt;rect x='668' y='96' width='548' height='4' rx='2' fill='#1F5FA8' /&gt;&lt;text x='686' y='130' fontSize='15.5' fontWeight='bold' fill='#1F5FA8' textAnchor='start' fontFamily='Microsoft YaHei'&gt;2.4 逻辑运算符：把条件组合起来&lt;/text&gt;&lt;text x='686' y='169.0' fontSize='13' fill='#3A4A58' textAnchor='start' fontFamily='Microsoft YaHei'&gt;· and：两边都为真才为真&lt;/text&gt;&lt;text x='686' y='197.5' fontSize='13' fill='#3A4A58' textAnchor='start' fontFamily='Microsoft YaHei'&gt;· or：两边有一个为真就为真&lt;/text&gt;&lt;text x='686' y='226.0' fontSize='13' fill='#3A4A58' textAnchor='start' fontFamily='Microsoft YaHei'&gt;· not：取反&lt;/text&gt;&lt;rect x='64' y='574' width='1152' height='66' rx='12' fill='#EEF5FB' /&gt;&lt;text x='84' y='616' fontSize='14' fill='#243444' textAnchor='start' fontFamily='Microsoft YaHei'&gt;看不懂的地方先回讲义对应小节读一遍，再回来对着这页复述一次——能讲出来才算真懂。&lt;/text&gt;&#13;&#10;            &lt;text x='64' y='684' fontSize='13' fill='#8A9AAA' fontFamily='Microsoft YaHei'&gt;Python 讲授课件 · 逐节版&lt;/text&gt;&#13;&#10;            &lt;text x='1216' y='684' fontSize='13' fill='#8A9AAA' textAnchor='end' fontFamily='Microsoft YaHei'&gt;单元 4 · 第 20 节&lt;/text&gt;&#13;&#10;        &lt;/svg&gt;&#13;&#10;    &lt;/Box&gt;&#13;&#10;&lt;/Slide&gt;&#13;&#10;"/>
+        <p:cNvPr id="42" name="" descr="&lt;Slide style={{ width: '1280px', height: '720px', backgroundColor: '#FAFCFE', padding: 0, position: 'relative', overflow: 'hidden' }}&gt;&#13;&#10;    &lt;Box style={{ position: 'absolute', left: 64, top: 36, width: '1152px', flexDirection: 'row', alignItems: 'center', gap: 12 }}&gt;&#13;&#10;        &lt;Box style={{ background: '#0E9B78', borderRadius: 5, padding: '3px 11px' }}&gt;&#13;&#10;            &lt;Text style={{ fontSize: 14, fontWeight: 'bold', color: '#FFFFFF' }}&gt;第 20 节&lt;/Text&gt;&#13;&#10;        &lt;/Box&gt;&#13;&#10;        &lt;Text style={{ fontSize: 30, fontWeight: 'bold', color: '#16232E' }}&gt;核心知识点&lt;/Text&gt;&#13;&#10;        &lt;Text style={{ fontSize: 15, color: '#5A6B7A', marginTop: 10 }}&gt;· 三分支结构与逻辑运算符&lt;/Text&gt;&#13;&#10;    &lt;/Box&gt;&#13;&#10;    &lt;Box style={{ position: 'absolute', left: 0, top: 0, width: '1280px', height: '720px' }}&gt;&#13;&#10;        &lt;svg width='1280' height='720' viewBox='0 0 1280 720'&gt;&#13;&#10;            &lt;rect x='64' y='96' width='548' height='330' rx='12' fill='#FFFFFF' stroke='#D8E3EE' /&gt;&lt;rect x='64' y='96' width='548' height='4' rx='2' fill='#1F5FA8' /&gt;&lt;text x='82' y='130' fontSize='15.5' fontWeight='bold' fill='#1F5FA8' textAnchor='start' fontFamily='Microsoft YaHei'&gt;2.3 三分支结构：if / elif / else&lt;/text&gt;&lt;text x='82' y='169.0' fontSize='13' fill='#3A4A58' textAnchor='start' fontFamily='Microsoft YaHei'&gt;· 顺序为什么重要&lt;/text&gt;&lt;rect x='668' y='96' width='548' height='330' rx='12' fill='#FFFFFF' stroke='#D8E3EE' /&gt;&lt;rect x='668' y='96' width='548' height='4' rx='2' fill='#1F5FA8' /&gt;&lt;text x='686' y='130' fontSize='15.5' fontWeight='bold' fill='#1F5FA8' textAnchor='start' fontFamily='Microsoft YaHei'&gt;2.4 逻辑运算符：把条件组合起来&lt;/text&gt;&lt;text x='686' y='169.0' fontSize='13' fill='#3A4A58' textAnchor='start' fontFamily='Microsoft YaHei'&gt;· and：两边都为真才为真&lt;/text&gt;&lt;text x='686' y='197.5' fontSize='13' fill='#3A4A58' textAnchor='start' fontFamily='Microsoft YaHei'&gt;· or：两边有一个为真就为真&lt;/text&gt;&lt;text x='686' y='226.0' fontSize='13' fill='#3A4A58' textAnchor='start' fontFamily='Microsoft YaHei'&gt;· not：取反&lt;/text&gt;&lt;rect x='64' y='574' width='1152' height='66' rx='12' fill='#EEF5FB' /&gt;&lt;text x='84' y='616' fontSize='14' fill='#243444' textAnchor='start' fontFamily='Microsoft YaHei'&gt;看不懂的地方先回讲义对应小节读一遍，再回来对着这页复述一次——能讲出来才算真懂。&lt;/text&gt;&#13;&#10;            &lt;text x='64' y='684' fontSize='13' fill='#8A9AAA' fontFamily='Microsoft YaHei'&gt;Python 讲授课件 · 逐节版&lt;/text&gt;&#13;&#10;            &lt;text x='1216' y='684' fontSize='13' fill='#8A9AAA' textAnchor='end' fontFamily='Microsoft YaHei'&gt;单元 4 · 第 20 节&lt;/text&gt;&#13;&#10;        &lt;/svg&gt;&#13;&#10;    &lt;/Box&gt;&#13;&#10;&lt;/Slide&gt;&#13;&#10;"/>
         <p:cNvGrpSpPr/>
         <p:nvPr/>
       </p:nvGrpSpPr>
@@ -2559,7 +2559,7 @@
   <p:cSld>
     <p:spTree>
       <p:nvGrpSpPr>
-        <p:cNvPr id="55" name="" descr="&lt;Slide style={{ width: '1280px', height: '720px', backgroundColor: '#FAFCFE', padding: 0, position: 'relative', overflow: 'hidden' }}&gt;&#13;&#10;    &lt;Box style={{ position: 'absolute', left: 64, top: 36, width: '1152px', flexDirection: 'row', alignItems: 'center', gap: 12 }}&gt;&#13;&#10;        &lt;Box style={{ background: '#0E9B78', borderRadius: 5, padding: '3px 11px' }}&gt;&#13;&#10;            &lt;Text style={{ fontSize: 14, fontWeight: 'bold', color: '#FFFFFF' }}&gt;第 21 节&lt;/Text&gt;&#13;&#10;        &lt;/Box&gt;&#13;&#10;        &lt;Text style={{ fontSize: 30, fontWeight: 'bold', color: '#16232E' }}&gt;核心知识点&lt;/Text&gt;&#13;&#10;        &lt;Text style={{ fontSize: 15, color: '#5A6B7A', marginTop: 10 }}&gt;· 链式比较、is 与条件表达式&lt;/Text&gt;&#13;&#10;    &lt;/Box&gt;&#13;&#10;    &lt;Box style={{ position: 'absolute', left: 0, top: 0, width: '1280px', height: '720px' }}&gt;&#13;&#10;        &lt;svg width='1280' height='720' viewBox='0 0 1280 720'&gt;&#13;&#10;            &lt;rect x='64' y='96' width='368' height='330' rx='12' fill='#FFFFFF' stroke='#D8E3EE' /&gt;&lt;rect x='64' y='96' width='368' height='4' rx='2' fill='#1F5FA8' /&gt;&lt;text x='82' y='130' fontSize='15.5' fontWeight='bold' fill='#1F5FA8' textAnchor='start' fontFamily='Microsoft YaHei'&gt;2.5 链式比较：Python 的贴心语法&lt;/text&gt;&lt;text x='82' y='169.0' fontSize='13' fill='#3A4A58' textAnchor='start' fontFamily='Microsoft YaHei'&gt;· Python 支持把比较串起来写，像数学一样：&lt;/text&gt;&lt;rect x='468' y='96' width='368' height='330' rx='12' fill='#FFFFFF' stroke='#D8E3EE' /&gt;&lt;rect x='468' y='96' width='368' height='4' rx='2' fill='#1F5FA8' /&gt;&lt;text x='486' y='130' fontSize='15.5' fontWeight='bold' fill='#1F5FA8' textAnchor='start' fontFamily='Microsoft YaHei'&gt;2.6 == 还是 is？&lt;/text&gt;&lt;text x='486' y='169.0' fontSize='13' fill='#3A4A58' textAnchor='start' fontFamily='Microsoft YaHei'&gt;· 为什么不用 if result == None？&lt;/text&gt;&lt;rect x='872' y='96' width='368' height='330' rx='12' fill='#FFFFFF' stroke='#D8E3EE' /&gt;&lt;rect x='872' y='96' width='368' height='4' rx='2' fill='#1F5FA8' /&gt;&lt;text x='890' y='130' fontSize='15.5' fontWeight='bold' fill='#1F5FA8' textAnchor='start' fontFamily='Microsoft YaHei'&gt;2.7 条件表达式：把 5 行压成 1 行&lt;/text&gt;&lt;text x='890' y='169.0' fontSize='13' fill='#3A4A58' textAnchor='start' fontFamily='Microsoft YaHei'&gt;· if age ＞= 18:&lt;/text&gt;&lt;text x='64' y='470' fontSize='14.5' fontWeight='bold' fill='#0E9B78' textAnchor='start' fontFamily='Microsoft YaHei'&gt;本节的代码示例&lt;/text&gt;&lt;text x='64' y='500' fontSize='13' fill='#3A4A58' textAnchor='start' fontFamily='Microsoft YaHei'&gt;· if 单分支&lt;/text&gt;&lt;text x='468' y='500' fontSize='13' fill='#3A4A58' textAnchor='start' fontFamily='Microsoft YaHei'&gt;· if / elif / else 三分支&lt;/text&gt;&lt;text x='872' y='500' fontSize='13' fill='#3A4A58' textAnchor='start' fontFamily='Microsoft YaHei'&gt;· 顺序的重要性&lt;/text&gt;&lt;rect x='64' y='574' width='1152' height='66' rx='12' fill='#EEF5FB' /&gt;&lt;text x='84' y='616' fontSize='14' fill='#243444' textAnchor='start' fontFamily='Microsoft YaHei'&gt;看不懂的地方先回讲义对应小节读一遍，再回来对着这页复述一次——能讲出来才算真懂。&lt;/text&gt;&#13;&#10;            &lt;text x='64' y='684' fontSize='13' fill='#8A9AAA' fontFamily='Microsoft YaHei'&gt;Python 讲授课件 · 逐节版&lt;/text&gt;&#13;&#10;            &lt;text x='1216' y='684' fontSize='13' fill='#8A9AAA' textAnchor='end' fontFamily='Microsoft YaHei'&gt;单元 4 · 第 21 节&lt;/text&gt;&#13;&#10;        &lt;/svg&gt;&#13;&#10;    &lt;/Box&gt;&#13;&#10;&lt;/Slide&gt;&#13;&#10;"/>
+        <p:cNvPr id="55" name="" descr="&lt;Slide style={{ width: '1280px', height: '720px', backgroundColor: '#FAFCFE', padding: 0, position: 'relative', overflow: 'hidden' }}&gt;&#13;&#10;    &lt;Box style={{ position: 'absolute', left: 64, top: 36, width: '1152px', flexDirection: 'row', alignItems: 'center', gap: 12 }}&gt;&#13;&#10;        &lt;Box style={{ background: '#0E9B78', borderRadius: 5, padding: '3px 11px' }}&gt;&#13;&#10;            &lt;Text style={{ fontSize: 14, fontWeight: 'bold', color: '#FFFFFF' }}&gt;第 21 节&lt;/Text&gt;&#13;&#10;        &lt;/Box&gt;&#13;&#10;        &lt;Text style={{ fontSize: 30, fontWeight: 'bold', color: '#16232E' }}&gt;核心知识点&lt;/Text&gt;&#13;&#10;        &lt;Text style={{ fontSize: 15, color: '#5A6B7A', marginTop: 10 }}&gt;· 链式比较、is 与条件表达式&lt;/Text&gt;&#13;&#10;    &lt;/Box&gt;&#13;&#10;    &lt;Box style={{ position: 'absolute', left: 0, top: 0, width: '1280px', height: '720px' }}&gt;&#13;&#10;        &lt;svg width='1280' height='720' viewBox='0 0 1280 720'&gt;&#13;&#10;            &lt;rect x='64' y='96' width='548' height='330' rx='12' fill='#FFFFFF' stroke='#D8E3EE' /&gt;&lt;rect x='64' y='96' width='548' height='4' rx='2' fill='#1F5FA8' /&gt;&lt;text x='82' y='130' fontSize='15.5' fontWeight='bold' fill='#1F5FA8' textAnchor='start' fontFamily='Microsoft YaHei'&gt;2.6 == 还是 is？&lt;/text&gt;&lt;text x='82' y='169.0' fontSize='13' fill='#3A4A58' textAnchor='start' fontFamily='Microsoft YaHei'&gt;· 为什么不用 if result == None？&lt;/text&gt;&lt;rect x='668' y='96' width='548' height='330' rx='12' fill='#FFFFFF' stroke='#D8E3EE' /&gt;&lt;rect x='668' y='96' width='548' height='4' rx='2' fill='#1F5FA8' /&gt;&lt;text x='686' y='130' fontSize='15.5' fontWeight='bold' fill='#1F5FA8' textAnchor='start' fontFamily='Microsoft YaHei'&gt;2.7 条件表达式：把 5 行压成 1 行&lt;/text&gt;&lt;text x='686' y='169.0' fontSize='13' fill='#3A4A58' textAnchor='start' fontFamily='Microsoft YaHei'&gt;· 结构是 真值时的结果 if 条件 else 假值时的结果。&lt;/text&gt;&lt;text x='64' y='470' fontSize='14.5' fontWeight='bold' fill='#0E9B78' textAnchor='start' fontFamily='Microsoft YaHei'&gt;本节的代码示例&lt;/text&gt;&lt;text x='64' y='500' fontSize='13' fill='#3A4A58' textAnchor='start' fontFamily='Microsoft YaHei'&gt;· if 单分支&lt;/text&gt;&lt;text x='468' y='500' fontSize='13' fill='#3A4A58' textAnchor='start' fontFamily='Microsoft YaHei'&gt;· if / elif / else 三分支&lt;/text&gt;&lt;text x='872' y='500' fontSize='13' fill='#3A4A58' textAnchor='start' fontFamily='Microsoft YaHei'&gt;· 顺序的重要性&lt;/text&gt;&lt;rect x='64' y='574' width='1152' height='66' rx='12' fill='#EEF5FB' /&gt;&lt;text x='84' y='616' fontSize='14' fill='#243444' textAnchor='start' fontFamily='Microsoft YaHei'&gt;看不懂的地方先回讲义对应小节读一遍，再回来对着这页复述一次——能讲出来才算真懂。&lt;/text&gt;&#13;&#10;            &lt;text x='64' y='684' fontSize='13' fill='#8A9AAA' fontFamily='Microsoft YaHei'&gt;Python 讲授课件 · 逐节版&lt;/text&gt;&#13;&#10;            &lt;text x='1216' y='684' fontSize='13' fill='#8A9AAA' textAnchor='end' fontFamily='Microsoft YaHei'&gt;单元 4 · 第 21 节&lt;/text&gt;&#13;&#10;        &lt;/svg&gt;&#13;&#10;    &lt;/Box&gt;&#13;&#10;&lt;/Slide&gt;&#13;&#10;"/>
         <p:cNvGrpSpPr/>
         <p:nvPr/>
       </p:nvGrpSpPr>
@@ -3010,7 +3010,7 @@
   <p:cSld>
     <p:spTree>
       <p:nvGrpSpPr>
-        <p:cNvPr id="68" name="" descr="&lt;Slide style={{ width: '1280px', height: '720px', backgroundColor: '#FAFCFE', padding: 0, position: 'relative', overflow: 'hidden' }}&gt;&#13;&#10;    &lt;Box style={{ position: 'absolute', left: 64, top: 36, width: '1152px', flexDirection: 'row', alignItems: 'center', gap: 12 }}&gt;&#13;&#10;        &lt;Box style={{ background: '#0E9B78', borderRadius: 5, padding: '3px 11px' }}&gt;&#13;&#10;            &lt;Text style={{ fontSize: 14, fontWeight: 'bold', color: '#FFFFFF' }}&gt;第 22 节&lt;/Text&gt;&#13;&#10;        &lt;/Box&gt;&#13;&#10;        &lt;Text style={{ fontSize: 30, fontWeight: 'bold', color: '#16232E' }}&gt;核心知识点&lt;/Text&gt;&#13;&#10;        &lt;Text style={{ fontSize: 15, color: '#5A6B7A', marginTop: 10 }}&gt;· 动手实战、答案与验收&lt;/Text&gt;&#13;&#10;    &lt;/Box&gt;&#13;&#10;    &lt;Box style={{ position: 'absolute', left: 0, top: 0, width: '1280px', height: '720px' }}&gt;&#13;&#10;        &lt;svg width='1280' height='720' viewBox='0 0 1280 720'&gt;&#13;&#10;            &lt;rect x='64' y='96' width='368' height='330' rx='12' fill='#FFFFFF' stroke='#D8E3EE' /&gt;&lt;rect x='64' y='96' width='368' height='4' rx='2' fill='#1F5FA8' /&gt;&lt;text x='82' y='130' fontSize='15.5' fontWeight='bold' fill='#1F5FA8' textAnchor='start' fontFamily='Microsoft YaHei'&gt;基础档&lt;/text&gt;&lt;text x='82' y='169.0' fontSize='13' fill='#3A4A58' textAnchor='start' fontFamily='Microsoft YaHei'&gt;· 练习 4-1【奇偶判断】&lt;/text&gt;&lt;text x='82' y='197.5' fontSize='13' fill='#3A4A58' textAnchor='start' fontFamily='Microsoft YaHei'&gt;· 练习 4-2【成绩等级】&lt;/text&gt;&lt;text x='82' y='226.0' fontSize='13' fill='#3A4A58' textAnchor='start' fontFamily='Microsoft YaHei'&gt;· 90分及以上 → 优秀&lt;/text&gt;&lt;rect x='468' y='96' width='368' height='330' rx='12' fill='#FFFFFF' stroke='#D8E3EE' /&gt;&lt;rect x='468' y='96' width='368' height='4' rx='2' fill='#1F5FA8' /&gt;&lt;text x='486' y='130' fontSize='15.5' fontWeight='bold' fill='#1F5FA8' textAnchor='start' fontFamily='Microsoft YaHei'&gt;进阶档&lt;/text&gt;&lt;text x='486' y='169.0' fontSize='13' fill='#3A4A58' textAnchor='start' fontFamily='Microsoft YaHei'&gt;· 练习 4-5【闰年判断】&lt;/text&gt;&lt;text x='486' y='197.5' fontSize='13' fill='#3A4A58' textAnchor='start' fontFamily='Microsoft YaHei'&gt;· 练习 4-6【三数之和与安全取值】&lt;/text&gt;&lt;text x='486' y='226.0' fontSize='13' fill='#3A4A58' textAnchor='start' fontFamily='Microsoft YaHei'&gt;· 练习 4-7【三角形判定】&lt;/text&gt;&lt;rect x='872' y='96' width='368' height='330' rx='12' fill='#FFFFFF' stroke='#D8E3EE' /&gt;&lt;rect x='872' y='96' width='368' height='4' rx='2' fill='#1F5FA8' /&gt;&lt;text x='890' y='130' fontSize='15.5' fontWeight='bold' fill='#1F5FA8' textAnchor='start' fontFamily='Microsoft YaHei'&gt;参考答案 4-1&lt;/text&gt;&lt;text x='890' y='169.0' fontSize='13' fill='#3A4A58' textAnchor='start' fontFamily='Microsoft YaHei'&gt;· number = 7&lt;/text&gt;&lt;rect x='64' y='574' width='1152' height='66' rx='12' fill='#EEF5FB' /&gt;&lt;text x='84' y='616' fontSize='14' fill='#243444' textAnchor='start' fontFamily='Microsoft YaHei'&gt;看不懂的地方先回讲义对应小节读一遍，再回来对着这页复述一次——能讲出来才算真懂。&lt;/text&gt;&#13;&#10;            &lt;text x='64' y='684' fontSize='13' fill='#8A9AAA' fontFamily='Microsoft YaHei'&gt;Python 讲授课件 · 逐节版&lt;/text&gt;&#13;&#10;            &lt;text x='1216' y='684' fontSize='13' fill='#8A9AAA' textAnchor='end' fontFamily='Microsoft YaHei'&gt;单元 4 · 第 22 节&lt;/text&gt;&#13;&#10;        &lt;/svg&gt;&#13;&#10;    &lt;/Box&gt;&#13;&#10;&lt;/Slide&gt;&#13;&#10;"/>
+        <p:cNvPr id="68" name="" descr="&lt;Slide style={{ width: '1280px', height: '720px', backgroundColor: '#FAFCFE', padding: 0, position: 'relative', overflow: 'hidden' }}&gt;&#13;&#10;    &lt;Box style={{ position: 'absolute', left: 64, top: 36, width: '1152px', flexDirection: 'row', alignItems: 'center', gap: 12 }}&gt;&#13;&#10;        &lt;Box style={{ background: '#0E9B78', borderRadius: 5, padding: '3px 11px' }}&gt;&#13;&#10;            &lt;Text style={{ fontSize: 14, fontWeight: 'bold', color: '#FFFFFF' }}&gt;第 22 节&lt;/Text&gt;&#13;&#10;        &lt;/Box&gt;&#13;&#10;        &lt;Text style={{ fontSize: 30, fontWeight: 'bold', color: '#16232E' }}&gt;核心知识点&lt;/Text&gt;&#13;&#10;        &lt;Text style={{ fontSize: 15, color: '#5A6B7A', marginTop: 10 }}&gt;· 动手实战、答案与验收&lt;/Text&gt;&#13;&#10;    &lt;/Box&gt;&#13;&#10;    &lt;Box style={{ position: 'absolute', left: 0, top: 0, width: '1280px', height: '720px' }}&gt;&#13;&#10;        &lt;svg width='1280' height='720' viewBox='0 0 1280 720'&gt;&#13;&#10;            &lt;rect x='64' y='96' width='368' height='330' rx='12' fill='#FFFFFF' stroke='#D8E3EE' /&gt;&lt;rect x='64' y='96' width='368' height='4' rx='2' fill='#1F5FA8' /&gt;&lt;text x='82' y='130' fontSize='15.5' fontWeight='bold' fill='#1F5FA8' textAnchor='start' fontFamily='Microsoft YaHei'&gt;基础档&lt;/text&gt;&lt;text x='82' y='169.0' fontSize='13' fill='#3A4A58' textAnchor='start' fontFamily='Microsoft YaHei'&gt;· 练习 4-1【奇偶判断】&lt;/text&gt;&lt;text x='82' y='197.5' fontSize='13' fill='#3A4A58' textAnchor='start' fontFamily='Microsoft YaHei'&gt;· 练习 4-2【成绩等级】&lt;/text&gt;&lt;text x='82' y='226.0' fontSize='13' fill='#3A4A58' textAnchor='start' fontFamily='Microsoft YaHei'&gt;· 90分及以上 → 优秀&lt;/text&gt;&lt;rect x='468' y='96' width='368' height='330' rx='12' fill='#FFFFFF' stroke='#D8E3EE' /&gt;&lt;rect x='468' y='96' width='368' height='4' rx='2' fill='#1F5FA8' /&gt;&lt;text x='486' y='130' fontSize='15.5' fontWeight='bold' fill='#1F5FA8' textAnchor='start' fontFamily='Microsoft YaHei'&gt;进阶档&lt;/text&gt;&lt;text x='486' y='169.0' fontSize='13' fill='#3A4A58' textAnchor='start' fontFamily='Microsoft YaHei'&gt;· 练习 4-5【闰年判断】&lt;/text&gt;&lt;text x='486' y='197.5' fontSize='13' fill='#3A4A58' textAnchor='start' fontFamily='Microsoft YaHei'&gt;· 练习 4-6【三数之和与安全取值】&lt;/text&gt;&lt;text x='486' y='226.0' fontSize='13' fill='#3A4A58' textAnchor='start' fontFamily='Microsoft YaHei'&gt;· 练习 4-7【三角形判定】&lt;/text&gt;&lt;rect x='872' y='96' width='368' height='330' rx='12' fill='#FFFFFF' stroke='#D8E3EE' /&gt;&lt;rect x='872' y='96' width='368' height='4' rx='2' fill='#1F5FA8' /&gt;&lt;text x='890' y='130' fontSize='15.5' fontWeight='bold' fill='#1F5FA8' textAnchor='start' fontFamily='Microsoft YaHei'&gt;参考答案 4-9&lt;/text&gt;&lt;text x='890' y='169.0' fontSize='13' fill='#3A4A58' textAnchor='start' fontFamily='Microsoft YaHei'&gt;· 注意 continue 的用法：空名字不进入后面的判断…&lt;/text&gt;&lt;rect x='64' y='574' width='1152' height='66' rx='12' fill='#EEF5FB' /&gt;&lt;text x='84' y='616' fontSize='14' fill='#243444' textAnchor='start' fontFamily='Microsoft YaHei'&gt;看不懂的地方先回讲义对应小节读一遍，再回来对着这页复述一次——能讲出来才算真懂。&lt;/text&gt;&#13;&#10;            &lt;text x='64' y='684' fontSize='13' fill='#8A9AAA' fontFamily='Microsoft YaHei'&gt;Python 讲授课件 · 逐节版&lt;/text&gt;&#13;&#10;            &lt;text x='1216' y='684' fontSize='13' fill='#8A9AAA' textAnchor='end' fontFamily='Microsoft YaHei'&gt;单元 4 · 第 22 节&lt;/text&gt;&#13;&#10;        &lt;/svg&gt;&#13;&#10;    &lt;/Box&gt;&#13;&#10;&lt;/Slide&gt;&#13;&#10;"/>
         <p:cNvGrpSpPr/>
         <p:nvPr/>
       </p:nvGrpSpPr>

--- a/python-course-ppt/逐节课件/Python讲授课件-单元04.pptx
+++ b/python-course-ppt/逐节课件/Python讲授课件-单元04.pptx
@@ -234,6 +234,1038 @@
     </a:lvl9pPr>
   </p:notesStyle>
 </p:notesMaster>
+</file>
+
+<file path=ppt/notesSlides/notesSlide1.xml><?xml version="1.0" encoding="utf-8"?>
+<p:notes xmlns:a="http://schemas.openxmlformats.org/drawingml/2006/main" xmlns:p="http://schemas.openxmlformats.org/presentationml/2006/main" xmlns:r="http://schemas.openxmlformats.org/officeDocument/2006/relationships">
+  <p:cSld>
+    <p:spTree>
+      <p:nvGrpSpPr>
+        <p:cNvPr id="1" name=""/>
+        <p:cNvGrpSpPr/>
+        <p:nvPr/>
+      </p:nvGrpSpPr>
+      <p:grpSpPr>
+        <a:xfrm>
+          <a:off x="0" y="0"/>
+          <a:ext cx="0" cy="0"/>
+          <a:chOff x="0" y="0"/>
+          <a:chExt cx="0" cy="0"/>
+        </a:xfrm>
+      </p:grpSpPr>
+      <p:sp>
+        <p:nvSpPr>
+          <p:cNvPr id="2" name="讲课提示"/>
+          <p:cNvSpPr txBox="1"/>
+          <p:nvPr/>
+        </p:nvSpPr>
+        <p:spPr>
+          <a:xfrm>
+            <a:off x="457200" y="457200"/>
+            <a:ext cx="6858000" cy="4800600"/>
+          </a:xfrm>
+          <a:prstGeom prst="rect">
+            <a:avLst/>
+          </a:prstGeom>
+        </p:spPr>
+        <p:txBody>
+          <a:bodyPr wrap="square"/>
+          <a:lstStyle/>
+          <a:p>
+            <a:r>
+              <a:rPr lang="zh-CN" dirty="0"/>
+              <a:t>单元 4 · 单元 4 · if 语句</a:t>
+            </a:r>
+          </a:p>
+          <a:p>
+            <a:r>
+              <a:rPr lang="zh-CN" dirty="0"/>
+              <a:t/>
+            </a:r>
+          </a:p>
+          <a:p>
+            <a:r>
+              <a:rPr lang="zh-CN" dirty="0"/>
+              <a:t>本单元包含以下课节：</a:t>
+            </a:r>
+          </a:p>
+          <a:p>
+            <a:r>
+              <a:rPr lang="zh-CN" dirty="0"/>
+              <a:t>· 第 19 节 条件测试与比较运算</a:t>
+            </a:r>
+          </a:p>
+          <a:p>
+            <a:r>
+              <a:rPr lang="zh-CN" dirty="0"/>
+              <a:t>· 第 20 节 三分支结构与逻辑运算符</a:t>
+            </a:r>
+          </a:p>
+          <a:p>
+            <a:r>
+              <a:rPr lang="zh-CN" dirty="0"/>
+              <a:t>· 第 21 节 链式比较、is 与条件表达式</a:t>
+            </a:r>
+          </a:p>
+          <a:p>
+            <a:r>
+              <a:rPr lang="zh-CN" dirty="0"/>
+              <a:t>· 第 22 节 动手实战、答案与验收</a:t>
+            </a:r>
+          </a:p>
+          <a:p>
+            <a:r>
+              <a:rPr lang="zh-CN" dirty="0"/>
+              <a:t/>
+            </a:r>
+          </a:p>
+          <a:p>
+            <a:r>
+              <a:rPr lang="zh-CN" dirty="0"/>
+              <a:t>开场用 3 分钟讲清：这个单元学完能做出什么，最后会被关卡怎么验。</a:t>
+            </a:r>
+          </a:p>
+        </p:txBody>
+      </p:sp>
+    </p:spTree>
+  </p:cSld>
+  <p:clrMapOvr>
+    <a:masterClrMapping/>
+  </p:clrMapOvr>
+</p:notes>
+</file>
+
+<file path=ppt/notesSlides/notesSlide10.xml><?xml version="1.0" encoding="utf-8"?>
+<p:notes xmlns:a="http://schemas.openxmlformats.org/drawingml/2006/main" xmlns:p="http://schemas.openxmlformats.org/presentationml/2006/main" xmlns:r="http://schemas.openxmlformats.org/officeDocument/2006/relationships">
+  <p:cSld>
+    <p:spTree>
+      <p:nvGrpSpPr>
+        <p:cNvPr id="1" name=""/>
+        <p:cNvGrpSpPr/>
+        <p:nvPr/>
+      </p:nvGrpSpPr>
+      <p:grpSpPr>
+        <a:xfrm>
+          <a:off x="0" y="0"/>
+          <a:ext cx="0" cy="0"/>
+          <a:chOff x="0" y="0"/>
+          <a:chExt cx="0" cy="0"/>
+        </a:xfrm>
+      </p:grpSpPr>
+      <p:sp>
+        <p:nvSpPr>
+          <p:cNvPr id="2" name="讲课提示"/>
+          <p:cNvSpPr txBox="1"/>
+          <p:nvPr/>
+        </p:nvSpPr>
+        <p:spPr>
+          <a:xfrm>
+            <a:off x="457200" y="457200"/>
+            <a:ext cx="6858000" cy="4800600"/>
+          </a:xfrm>
+          <a:prstGeom prst="rect">
+            <a:avLst/>
+          </a:prstGeom>
+        </p:spPr>
+        <p:txBody>
+          <a:bodyPr wrap="square"/>
+          <a:lstStyle/>
+          <a:p>
+            <a:r>
+              <a:rPr lang="zh-CN" dirty="0"/>
+              <a:t>单元 4 小结 · 单元 4 · 小结</a:t>
+            </a:r>
+          </a:p>
+          <a:p>
+            <a:r>
+              <a:rPr lang="zh-CN" dirty="0"/>
+              <a:t/>
+            </a:r>
+          </a:p>
+          <a:p>
+            <a:r>
+              <a:rPr lang="zh-CN" dirty="0"/>
+              <a:t>收尾动作：让学生合上讲义，口述本单元三个最重要的结论；说不出来的，回对应课节。</a:t>
+            </a:r>
+          </a:p>
+          <a:p>
+            <a:r>
+              <a:rPr lang="zh-CN" dirty="0"/>
+              <a:t>然后当场勾一遍本单元课节的「已完成」，没打勾的进下一单元前补掉。</a:t>
+            </a:r>
+          </a:p>
+        </p:txBody>
+      </p:sp>
+    </p:spTree>
+  </p:cSld>
+  <p:clrMapOvr>
+    <a:masterClrMapping/>
+  </p:clrMapOvr>
+</p:notes>
+</file>
+
+<file path=ppt/notesSlides/notesSlide2.xml><?xml version="1.0" encoding="utf-8"?>
+<p:notes xmlns:a="http://schemas.openxmlformats.org/drawingml/2006/main" xmlns:p="http://schemas.openxmlformats.org/presentationml/2006/main" xmlns:r="http://schemas.openxmlformats.org/officeDocument/2006/relationships">
+  <p:cSld>
+    <p:spTree>
+      <p:nvGrpSpPr>
+        <p:cNvPr id="1" name=""/>
+        <p:cNvGrpSpPr/>
+        <p:nvPr/>
+      </p:nvGrpSpPr>
+      <p:grpSpPr>
+        <a:xfrm>
+          <a:off x="0" y="0"/>
+          <a:ext cx="0" cy="0"/>
+          <a:chOff x="0" y="0"/>
+          <a:chExt cx="0" cy="0"/>
+        </a:xfrm>
+      </p:grpSpPr>
+      <p:sp>
+        <p:nvSpPr>
+          <p:cNvPr id="2" name="讲课提示"/>
+          <p:cNvSpPr txBox="1"/>
+          <p:nvPr/>
+        </p:nvSpPr>
+        <p:spPr>
+          <a:xfrm>
+            <a:off x="457200" y="457200"/>
+            <a:ext cx="6858000" cy="4800600"/>
+          </a:xfrm>
+          <a:prstGeom prst="rect">
+            <a:avLst/>
+          </a:prstGeom>
+        </p:spPr>
+        <p:txBody>
+          <a:bodyPr wrap="square"/>
+          <a:lstStyle/>
+          <a:p>
+            <a:r>
+              <a:rPr lang="zh-CN" dirty="0"/>
+              <a:t>第 19 节 · 条件测试与比较运算</a:t>
+            </a:r>
+          </a:p>
+          <a:p>
+            <a:r>
+              <a:rPr lang="zh-CN" dirty="0"/>
+              <a:t>单元 4 · if 语句 · W4</a:t>
+            </a:r>
+          </a:p>
+          <a:p>
+            <a:r>
+              <a:rPr lang="zh-CN" dirty="0"/>
+              <a:t/>
+            </a:r>
+          </a:p>
+          <a:p>
+            <a:r>
+              <a:rPr lang="zh-CN" dirty="0"/>
+              <a:t>学习目标：掌握六个比较运算符和 in / not in</a:t>
+            </a:r>
+          </a:p>
+          <a:p>
+            <a:r>
+              <a:rPr lang="zh-CN" dirty="0"/>
+              <a:t/>
+            </a:r>
+          </a:p>
+          <a:p>
+            <a:r>
+              <a:rPr lang="zh-CN" dirty="0"/>
+              <a:t>课堂实操（40 分钟，不看答案）：</a:t>
+            </a:r>
+          </a:p>
+          <a:p>
+            <a:r>
+              <a:rPr lang="zh-CN" dirty="0"/>
+              <a:t>· 现场预测 8 个表达式的 True/False 再验证</a:t>
+            </a:r>
+          </a:p>
+          <a:p>
+            <a:r>
+              <a:rPr lang="zh-CN" dirty="0"/>
+              <a:t>· 故意用 is 比较字符串看结果</a:t>
+            </a:r>
+          </a:p>
+          <a:p>
+            <a:r>
+              <a:rPr lang="zh-CN" dirty="0"/>
+              <a:t/>
+            </a:r>
+          </a:p>
+          <a:p>
+            <a:r>
+              <a:rPr lang="zh-CN" dirty="0"/>
+              <a:t>课后作业：</a:t>
+            </a:r>
+          </a:p>
+          <a:p>
+            <a:r>
+              <a:rPr lang="zh-CN" dirty="0"/>
+              <a:t>· 完成动手练习 4-1 ~ 4-2</a:t>
+            </a:r>
+          </a:p>
+          <a:p>
+            <a:r>
+              <a:rPr lang="zh-CN" dirty="0"/>
+              <a:t/>
+            </a:r>
+          </a:p>
+          <a:p>
+            <a:r>
+              <a:rPr lang="zh-CN" dirty="0"/>
+              <a:t>节奏：讲 20 分钟 → 学员自己敲 40 分钟（不看答案）→ 对讲评自查 20 分钟 → 写作业 10 分钟。</a:t>
+            </a:r>
+          </a:p>
+        </p:txBody>
+      </p:sp>
+    </p:spTree>
+  </p:cSld>
+  <p:clrMapOvr>
+    <a:masterClrMapping/>
+  </p:clrMapOvr>
+</p:notes>
+</file>
+
+<file path=ppt/notesSlides/notesSlide3.xml><?xml version="1.0" encoding="utf-8"?>
+<p:notes xmlns:a="http://schemas.openxmlformats.org/drawingml/2006/main" xmlns:p="http://schemas.openxmlformats.org/presentationml/2006/main" xmlns:r="http://schemas.openxmlformats.org/officeDocument/2006/relationships">
+  <p:cSld>
+    <p:spTree>
+      <p:nvGrpSpPr>
+        <p:cNvPr id="1" name=""/>
+        <p:cNvGrpSpPr/>
+        <p:nvPr/>
+      </p:nvGrpSpPr>
+      <p:grpSpPr>
+        <a:xfrm>
+          <a:off x="0" y="0"/>
+          <a:ext cx="0" cy="0"/>
+          <a:chOff x="0" y="0"/>
+          <a:chExt cx="0" cy="0"/>
+        </a:xfrm>
+      </p:grpSpPr>
+      <p:sp>
+        <p:nvSpPr>
+          <p:cNvPr id="2" name="讲课提示"/>
+          <p:cNvSpPr txBox="1"/>
+          <p:nvPr/>
+        </p:nvSpPr>
+        <p:spPr>
+          <a:xfrm>
+            <a:off x="457200" y="457200"/>
+            <a:ext cx="6858000" cy="4800600"/>
+          </a:xfrm>
+          <a:prstGeom prst="rect">
+            <a:avLst/>
+          </a:prstGeom>
+        </p:spPr>
+        <p:txBody>
+          <a:bodyPr wrap="square"/>
+          <a:lstStyle/>
+          <a:p>
+            <a:r>
+              <a:rPr lang="zh-CN" dirty="0"/>
+              <a:t>第 19 节 · 核心知识点：条件测试与比较运算</a:t>
+            </a:r>
+          </a:p>
+          <a:p>
+            <a:r>
+              <a:rPr lang="zh-CN" dirty="0"/>
+              <a:t/>
+            </a:r>
+          </a:p>
+          <a:p>
+            <a:r>
+              <a:rPr lang="zh-CN" dirty="0"/>
+              <a:t>讲这一页时：先让学生说出上节课的结论，再逐块讲要点。</a:t>
+            </a:r>
+          </a:p>
+          <a:p>
+            <a:r>
+              <a:rPr lang="zh-CN" dirty="0"/>
+              <a:t>每讲完一块，问一句「这一步如果写错了，报错会长什么样？」——把错误提前讲。</a:t>
+            </a:r>
+          </a:p>
+          <a:p>
+            <a:r>
+              <a:rPr lang="zh-CN" dirty="0"/>
+              <a:t/>
+            </a:r>
+          </a:p>
+          <a:p>
+            <a:r>
+              <a:rPr lang="zh-CN" dirty="0"/>
+              <a:t>本节目标：掌握六个比较运算符和 in / not in</a:t>
+            </a:r>
+          </a:p>
+          <a:p>
+            <a:r>
+              <a:rPr lang="zh-CN" dirty="0"/>
+              <a:t/>
+            </a:r>
+          </a:p>
+          <a:p>
+            <a:r>
+              <a:rPr lang="zh-CN" dirty="0"/>
+              <a:t>看不到懂的地方，回讲义对应小节读一遍，再回来对着这页复述一次——能讲出来才算真懂。</a:t>
+            </a:r>
+          </a:p>
+        </p:txBody>
+      </p:sp>
+    </p:spTree>
+  </p:cSld>
+  <p:clrMapOvr>
+    <a:masterClrMapping/>
+  </p:clrMapOvr>
+</p:notes>
+</file>
+
+<file path=ppt/notesSlides/notesSlide4.xml><?xml version="1.0" encoding="utf-8"?>
+<p:notes xmlns:a="http://schemas.openxmlformats.org/drawingml/2006/main" xmlns:p="http://schemas.openxmlformats.org/presentationml/2006/main" xmlns:r="http://schemas.openxmlformats.org/officeDocument/2006/relationships">
+  <p:cSld>
+    <p:spTree>
+      <p:nvGrpSpPr>
+        <p:cNvPr id="1" name=""/>
+        <p:cNvGrpSpPr/>
+        <p:nvPr/>
+      </p:nvGrpSpPr>
+      <p:grpSpPr>
+        <a:xfrm>
+          <a:off x="0" y="0"/>
+          <a:ext cx="0" cy="0"/>
+          <a:chOff x="0" y="0"/>
+          <a:chExt cx="0" cy="0"/>
+        </a:xfrm>
+      </p:grpSpPr>
+      <p:sp>
+        <p:nvSpPr>
+          <p:cNvPr id="2" name="讲课提示"/>
+          <p:cNvSpPr txBox="1"/>
+          <p:nvPr/>
+        </p:nvSpPr>
+        <p:spPr>
+          <a:xfrm>
+            <a:off x="457200" y="457200"/>
+            <a:ext cx="6858000" cy="4800600"/>
+          </a:xfrm>
+          <a:prstGeom prst="rect">
+            <a:avLst/>
+          </a:prstGeom>
+        </p:spPr>
+        <p:txBody>
+          <a:bodyPr wrap="square"/>
+          <a:lstStyle/>
+          <a:p>
+            <a:r>
+              <a:rPr lang="zh-CN" dirty="0"/>
+              <a:t>第 20 节 · 三分支结构与逻辑运算符</a:t>
+            </a:r>
+          </a:p>
+          <a:p>
+            <a:r>
+              <a:rPr lang="zh-CN" dirty="0"/>
+              <a:t>单元 4 · if 语句 · W4</a:t>
+            </a:r>
+          </a:p>
+          <a:p>
+            <a:r>
+              <a:rPr lang="zh-CN" dirty="0"/>
+              <a:t/>
+            </a:r>
+          </a:p>
+          <a:p>
+            <a:r>
+              <a:rPr lang="zh-CN" dirty="0"/>
+              <a:t>学习目标：掌握 if / elif / else 与 and / or / not，理解顺序为什么重要</a:t>
+            </a:r>
+          </a:p>
+          <a:p>
+            <a:r>
+              <a:rPr lang="zh-CN" dirty="0"/>
+              <a:t/>
+            </a:r>
+          </a:p>
+          <a:p>
+            <a:r>
+              <a:rPr lang="zh-CN" dirty="0"/>
+              <a:t>课堂实操（40 分钟，不看答案）：</a:t>
+            </a:r>
+          </a:p>
+          <a:p>
+            <a:r>
+              <a:rPr lang="zh-CN" dirty="0"/>
+              <a:t>· 写一个票价分级程序，故意把条件顺序写反看结果</a:t>
+            </a:r>
+          </a:p>
+          <a:p>
+            <a:r>
+              <a:rPr lang="zh-CN" dirty="0"/>
+              <a:t>· 演示短路求值</a:t>
+            </a:r>
+          </a:p>
+          <a:p>
+            <a:r>
+              <a:rPr lang="zh-CN" dirty="0"/>
+              <a:t/>
+            </a:r>
+          </a:p>
+          <a:p>
+            <a:r>
+              <a:rPr lang="zh-CN" dirty="0"/>
+              <a:t>课后作业：</a:t>
+            </a:r>
+          </a:p>
+          <a:p>
+            <a:r>
+              <a:rPr lang="zh-CN" dirty="0"/>
+              <a:t>· 完成动手练习 4-3 ~ 4-5</a:t>
+            </a:r>
+          </a:p>
+          <a:p>
+            <a:r>
+              <a:rPr lang="zh-CN" dirty="0"/>
+              <a:t/>
+            </a:r>
+          </a:p>
+          <a:p>
+            <a:r>
+              <a:rPr lang="zh-CN" dirty="0"/>
+              <a:t>节奏：讲 20 分钟 → 学员自己敲 40 分钟（不看答案）→ 对讲评自查 20 分钟 → 写作业 10 分钟。</a:t>
+            </a:r>
+          </a:p>
+        </p:txBody>
+      </p:sp>
+    </p:spTree>
+  </p:cSld>
+  <p:clrMapOvr>
+    <a:masterClrMapping/>
+  </p:clrMapOvr>
+</p:notes>
+</file>
+
+<file path=ppt/notesSlides/notesSlide5.xml><?xml version="1.0" encoding="utf-8"?>
+<p:notes xmlns:a="http://schemas.openxmlformats.org/drawingml/2006/main" xmlns:p="http://schemas.openxmlformats.org/presentationml/2006/main" xmlns:r="http://schemas.openxmlformats.org/officeDocument/2006/relationships">
+  <p:cSld>
+    <p:spTree>
+      <p:nvGrpSpPr>
+        <p:cNvPr id="1" name=""/>
+        <p:cNvGrpSpPr/>
+        <p:nvPr/>
+      </p:nvGrpSpPr>
+      <p:grpSpPr>
+        <a:xfrm>
+          <a:off x="0" y="0"/>
+          <a:ext cx="0" cy="0"/>
+          <a:chOff x="0" y="0"/>
+          <a:chExt cx="0" cy="0"/>
+        </a:xfrm>
+      </p:grpSpPr>
+      <p:sp>
+        <p:nvSpPr>
+          <p:cNvPr id="2" name="讲课提示"/>
+          <p:cNvSpPr txBox="1"/>
+          <p:nvPr/>
+        </p:nvSpPr>
+        <p:spPr>
+          <a:xfrm>
+            <a:off x="457200" y="457200"/>
+            <a:ext cx="6858000" cy="4800600"/>
+          </a:xfrm>
+          <a:prstGeom prst="rect">
+            <a:avLst/>
+          </a:prstGeom>
+        </p:spPr>
+        <p:txBody>
+          <a:bodyPr wrap="square"/>
+          <a:lstStyle/>
+          <a:p>
+            <a:r>
+              <a:rPr lang="zh-CN" dirty="0"/>
+              <a:t>第 20 节 · 核心知识点：三分支结构与逻辑运算符</a:t>
+            </a:r>
+          </a:p>
+          <a:p>
+            <a:r>
+              <a:rPr lang="zh-CN" dirty="0"/>
+              <a:t/>
+            </a:r>
+          </a:p>
+          <a:p>
+            <a:r>
+              <a:rPr lang="zh-CN" dirty="0"/>
+              <a:t>讲这一页时：先让学生说出上节课的结论，再逐块讲要点。</a:t>
+            </a:r>
+          </a:p>
+          <a:p>
+            <a:r>
+              <a:rPr lang="zh-CN" dirty="0"/>
+              <a:t>每讲完一块，问一句「这一步如果写错了，报错会长什么样？」——把错误提前讲。</a:t>
+            </a:r>
+          </a:p>
+          <a:p>
+            <a:r>
+              <a:rPr lang="zh-CN" dirty="0"/>
+              <a:t/>
+            </a:r>
+          </a:p>
+          <a:p>
+            <a:r>
+              <a:rPr lang="zh-CN" dirty="0"/>
+              <a:t>本节目标：掌握 if / elif / else 与 and / or / not，理解顺序为什么重要</a:t>
+            </a:r>
+          </a:p>
+          <a:p>
+            <a:r>
+              <a:rPr lang="zh-CN" dirty="0"/>
+              <a:t/>
+            </a:r>
+          </a:p>
+          <a:p>
+            <a:r>
+              <a:rPr lang="zh-CN" dirty="0"/>
+              <a:t>看不到懂的地方，回讲义对应小节读一遍，再回来对着这页复述一次——能讲出来才算真懂。</a:t>
+            </a:r>
+          </a:p>
+        </p:txBody>
+      </p:sp>
+    </p:spTree>
+  </p:cSld>
+  <p:clrMapOvr>
+    <a:masterClrMapping/>
+  </p:clrMapOvr>
+</p:notes>
+</file>
+
+<file path=ppt/notesSlides/notesSlide6.xml><?xml version="1.0" encoding="utf-8"?>
+<p:notes xmlns:a="http://schemas.openxmlformats.org/drawingml/2006/main" xmlns:p="http://schemas.openxmlformats.org/presentationml/2006/main" xmlns:r="http://schemas.openxmlformats.org/officeDocument/2006/relationships">
+  <p:cSld>
+    <p:spTree>
+      <p:nvGrpSpPr>
+        <p:cNvPr id="1" name=""/>
+        <p:cNvGrpSpPr/>
+        <p:nvPr/>
+      </p:nvGrpSpPr>
+      <p:grpSpPr>
+        <a:xfrm>
+          <a:off x="0" y="0"/>
+          <a:ext cx="0" cy="0"/>
+          <a:chOff x="0" y="0"/>
+          <a:chExt cx="0" cy="0"/>
+        </a:xfrm>
+      </p:grpSpPr>
+      <p:sp>
+        <p:nvSpPr>
+          <p:cNvPr id="2" name="讲课提示"/>
+          <p:cNvSpPr txBox="1"/>
+          <p:nvPr/>
+        </p:nvSpPr>
+        <p:spPr>
+          <a:xfrm>
+            <a:off x="457200" y="457200"/>
+            <a:ext cx="6858000" cy="4800600"/>
+          </a:xfrm>
+          <a:prstGeom prst="rect">
+            <a:avLst/>
+          </a:prstGeom>
+        </p:spPr>
+        <p:txBody>
+          <a:bodyPr wrap="square"/>
+          <a:lstStyle/>
+          <a:p>
+            <a:r>
+              <a:rPr lang="zh-CN" dirty="0"/>
+              <a:t>第 21 节 · 链式比较、is 与条件表达式</a:t>
+            </a:r>
+          </a:p>
+          <a:p>
+            <a:r>
+              <a:rPr lang="zh-CN" dirty="0"/>
+              <a:t>单元 4 · if 语句 · W4</a:t>
+            </a:r>
+          </a:p>
+          <a:p>
+            <a:r>
+              <a:rPr lang="zh-CN" dirty="0"/>
+              <a:t/>
+            </a:r>
+          </a:p>
+          <a:p>
+            <a:r>
+              <a:rPr lang="zh-CN" dirty="0"/>
+              <a:t>学习目标：能用链式比较、== 与 is、条件表达式写出更干净的判断</a:t>
+            </a:r>
+          </a:p>
+          <a:p>
+            <a:r>
+              <a:rPr lang="zh-CN" dirty="0"/>
+              <a:t/>
+            </a:r>
+          </a:p>
+          <a:p>
+            <a:r>
+              <a:rPr lang="zh-CN" dirty="0"/>
+              <a:t>课堂实操（40 分钟，不看答案）：</a:t>
+            </a:r>
+          </a:p>
+          <a:p>
+            <a:r>
+              <a:rPr lang="zh-CN" dirty="0"/>
+              <a:t>· 把嵌套 if 改成 elif 链和条件表达式两种写法</a:t>
+            </a:r>
+          </a:p>
+          <a:p>
+            <a:r>
+              <a:rPr lang="zh-CN" dirty="0"/>
+              <a:t/>
+            </a:r>
+          </a:p>
+          <a:p>
+            <a:r>
+              <a:rPr lang="zh-CN" dirty="0"/>
+              <a:t>课后作业：</a:t>
+            </a:r>
+          </a:p>
+          <a:p>
+            <a:r>
+              <a:rPr lang="zh-CN" dirty="0"/>
+              <a:t>· 完成动手练习进阶档 4-6 ~ 4-8</a:t>
+            </a:r>
+          </a:p>
+          <a:p>
+            <a:r>
+              <a:rPr lang="zh-CN" dirty="0"/>
+              <a:t/>
+            </a:r>
+          </a:p>
+          <a:p>
+            <a:r>
+              <a:rPr lang="zh-CN" dirty="0"/>
+              <a:t>节奏：讲 20 分钟 → 学员自己敲 40 分钟（不看答案）→ 对讲评自查 20 分钟 → 写作业 10 分钟。</a:t>
+            </a:r>
+          </a:p>
+        </p:txBody>
+      </p:sp>
+    </p:spTree>
+  </p:cSld>
+  <p:clrMapOvr>
+    <a:masterClrMapping/>
+  </p:clrMapOvr>
+</p:notes>
+</file>
+
+<file path=ppt/notesSlides/notesSlide7.xml><?xml version="1.0" encoding="utf-8"?>
+<p:notes xmlns:a="http://schemas.openxmlformats.org/drawingml/2006/main" xmlns:p="http://schemas.openxmlformats.org/presentationml/2006/main" xmlns:r="http://schemas.openxmlformats.org/officeDocument/2006/relationships">
+  <p:cSld>
+    <p:spTree>
+      <p:nvGrpSpPr>
+        <p:cNvPr id="1" name=""/>
+        <p:cNvGrpSpPr/>
+        <p:nvPr/>
+      </p:nvGrpSpPr>
+      <p:grpSpPr>
+        <a:xfrm>
+          <a:off x="0" y="0"/>
+          <a:ext cx="0" cy="0"/>
+          <a:chOff x="0" y="0"/>
+          <a:chExt cx="0" cy="0"/>
+        </a:xfrm>
+      </p:grpSpPr>
+      <p:sp>
+        <p:nvSpPr>
+          <p:cNvPr id="2" name="讲课提示"/>
+          <p:cNvSpPr txBox="1"/>
+          <p:nvPr/>
+        </p:nvSpPr>
+        <p:spPr>
+          <a:xfrm>
+            <a:off x="457200" y="457200"/>
+            <a:ext cx="6858000" cy="4800600"/>
+          </a:xfrm>
+          <a:prstGeom prst="rect">
+            <a:avLst/>
+          </a:prstGeom>
+        </p:spPr>
+        <p:txBody>
+          <a:bodyPr wrap="square"/>
+          <a:lstStyle/>
+          <a:p>
+            <a:r>
+              <a:rPr lang="zh-CN" dirty="0"/>
+              <a:t>第 21 节 · 核心知识点：链式比较、is 与条件表达式</a:t>
+            </a:r>
+          </a:p>
+          <a:p>
+            <a:r>
+              <a:rPr lang="zh-CN" dirty="0"/>
+              <a:t/>
+            </a:r>
+          </a:p>
+          <a:p>
+            <a:r>
+              <a:rPr lang="zh-CN" dirty="0"/>
+              <a:t>讲这一页时：先让学生说出上节课的结论，再逐块讲要点。</a:t>
+            </a:r>
+          </a:p>
+          <a:p>
+            <a:r>
+              <a:rPr lang="zh-CN" dirty="0"/>
+              <a:t>每讲完一块，问一句「这一步如果写错了，报错会长什么样？」——把错误提前讲。</a:t>
+            </a:r>
+          </a:p>
+          <a:p>
+            <a:r>
+              <a:rPr lang="zh-CN" dirty="0"/>
+              <a:t/>
+            </a:r>
+          </a:p>
+          <a:p>
+            <a:r>
+              <a:rPr lang="zh-CN" dirty="0"/>
+              <a:t>本节目标：能用链式比较、== 与 is、条件表达式写出更干净的判断</a:t>
+            </a:r>
+          </a:p>
+          <a:p>
+            <a:r>
+              <a:rPr lang="zh-CN" dirty="0"/>
+              <a:t/>
+            </a:r>
+          </a:p>
+          <a:p>
+            <a:r>
+              <a:rPr lang="zh-CN" dirty="0"/>
+              <a:t>看不到懂的地方，回讲义对应小节读一遍，再回来对着这页复述一次——能讲出来才算真懂。</a:t>
+            </a:r>
+          </a:p>
+        </p:txBody>
+      </p:sp>
+    </p:spTree>
+  </p:cSld>
+  <p:clrMapOvr>
+    <a:masterClrMapping/>
+  </p:clrMapOvr>
+</p:notes>
+</file>
+
+<file path=ppt/notesSlides/notesSlide8.xml><?xml version="1.0" encoding="utf-8"?>
+<p:notes xmlns:a="http://schemas.openxmlformats.org/drawingml/2006/main" xmlns:p="http://schemas.openxmlformats.org/presentationml/2006/main" xmlns:r="http://schemas.openxmlformats.org/officeDocument/2006/relationships">
+  <p:cSld>
+    <p:spTree>
+      <p:nvGrpSpPr>
+        <p:cNvPr id="1" name=""/>
+        <p:cNvGrpSpPr/>
+        <p:nvPr/>
+      </p:nvGrpSpPr>
+      <p:grpSpPr>
+        <a:xfrm>
+          <a:off x="0" y="0"/>
+          <a:ext cx="0" cy="0"/>
+          <a:chOff x="0" y="0"/>
+          <a:chExt cx="0" cy="0"/>
+        </a:xfrm>
+      </p:grpSpPr>
+      <p:sp>
+        <p:nvSpPr>
+          <p:cNvPr id="2" name="讲课提示"/>
+          <p:cNvSpPr txBox="1"/>
+          <p:nvPr/>
+        </p:nvSpPr>
+        <p:spPr>
+          <a:xfrm>
+            <a:off x="457200" y="457200"/>
+            <a:ext cx="6858000" cy="4800600"/>
+          </a:xfrm>
+          <a:prstGeom prst="rect">
+            <a:avLst/>
+          </a:prstGeom>
+        </p:spPr>
+        <p:txBody>
+          <a:bodyPr wrap="square"/>
+          <a:lstStyle/>
+          <a:p>
+            <a:r>
+              <a:rPr lang="zh-CN" dirty="0"/>
+              <a:t>第 22 节 · 动手实战、答案与验收</a:t>
+            </a:r>
+          </a:p>
+          <a:p>
+            <a:r>
+              <a:rPr lang="zh-CN" dirty="0"/>
+              <a:t>单元 4 · if 语句 · W4</a:t>
+            </a:r>
+          </a:p>
+          <a:p>
+            <a:r>
+              <a:rPr lang="zh-CN" dirty="0"/>
+              <a:t/>
+            </a:r>
+          </a:p>
+          <a:p>
+            <a:r>
+              <a:rPr lang="zh-CN" dirty="0"/>
+              <a:t>学习目标：独立完成单元 4 练习，确认条件判断全部过关</a:t>
+            </a:r>
+          </a:p>
+          <a:p>
+            <a:r>
+              <a:rPr lang="zh-CN" dirty="0"/>
+              <a:t/>
+            </a:r>
+          </a:p>
+          <a:p>
+            <a:r>
+              <a:rPr lang="zh-CN" dirty="0"/>
+              <a:t>课堂实操（40 分钟，不看答案）：</a:t>
+            </a:r>
+          </a:p>
+          <a:p>
+            <a:r>
+              <a:rPr lang="zh-CN" dirty="0"/>
+              <a:t>· 限时 25 分钟独立完成基础档</a:t>
+            </a:r>
+          </a:p>
+          <a:p>
+            <a:r>
+              <a:rPr lang="zh-CN" dirty="0"/>
+              <a:t>· 逐条打勾验收自测</a:t>
+            </a:r>
+          </a:p>
+          <a:p>
+            <a:r>
+              <a:rPr lang="zh-CN" dirty="0"/>
+              <a:t/>
+            </a:r>
+          </a:p>
+          <a:p>
+            <a:r>
+              <a:rPr lang="zh-CN" dirty="0"/>
+              <a:t>课后作业：</a:t>
+            </a:r>
+          </a:p>
+          <a:p>
+            <a:r>
+              <a:rPr lang="zh-CN" dirty="0"/>
+              <a:t>· 产出：3 个条件判断小程序</a:t>
+            </a:r>
+          </a:p>
+          <a:p>
+            <a:r>
+              <a:rPr lang="zh-CN" dirty="0"/>
+              <a:t>· 完成本单元小结与产出检查</a:t>
+            </a:r>
+          </a:p>
+          <a:p>
+            <a:r>
+              <a:rPr lang="zh-CN" dirty="0"/>
+              <a:t/>
+            </a:r>
+          </a:p>
+          <a:p>
+            <a:r>
+              <a:rPr lang="zh-CN" dirty="0"/>
+              <a:t>节奏：讲 20 分钟 → 学员自己敲 40 分钟（不看答案）→ 对讲评自查 20 分钟 → 写作业 10 分钟。</a:t>
+            </a:r>
+          </a:p>
+        </p:txBody>
+      </p:sp>
+    </p:spTree>
+  </p:cSld>
+  <p:clrMapOvr>
+    <a:masterClrMapping/>
+  </p:clrMapOvr>
+</p:notes>
+</file>
+
+<file path=ppt/notesSlides/notesSlide9.xml><?xml version="1.0" encoding="utf-8"?>
+<p:notes xmlns:a="http://schemas.openxmlformats.org/drawingml/2006/main" xmlns:p="http://schemas.openxmlformats.org/presentationml/2006/main" xmlns:r="http://schemas.openxmlformats.org/officeDocument/2006/relationships">
+  <p:cSld>
+    <p:spTree>
+      <p:nvGrpSpPr>
+        <p:cNvPr id="1" name=""/>
+        <p:cNvGrpSpPr/>
+        <p:nvPr/>
+      </p:nvGrpSpPr>
+      <p:grpSpPr>
+        <a:xfrm>
+          <a:off x="0" y="0"/>
+          <a:ext cx="0" cy="0"/>
+          <a:chOff x="0" y="0"/>
+          <a:chExt cx="0" cy="0"/>
+        </a:xfrm>
+      </p:grpSpPr>
+      <p:sp>
+        <p:nvSpPr>
+          <p:cNvPr id="2" name="讲课提示"/>
+          <p:cNvSpPr txBox="1"/>
+          <p:nvPr/>
+        </p:nvSpPr>
+        <p:spPr>
+          <a:xfrm>
+            <a:off x="457200" y="457200"/>
+            <a:ext cx="6858000" cy="4800600"/>
+          </a:xfrm>
+          <a:prstGeom prst="rect">
+            <a:avLst/>
+          </a:prstGeom>
+        </p:spPr>
+        <p:txBody>
+          <a:bodyPr wrap="square"/>
+          <a:lstStyle/>
+          <a:p>
+            <a:r>
+              <a:rPr lang="zh-CN" dirty="0"/>
+              <a:t>第 22 节 · 核心知识点：动手实战、答案与验收</a:t>
+            </a:r>
+          </a:p>
+          <a:p>
+            <a:r>
+              <a:rPr lang="zh-CN" dirty="0"/>
+              <a:t/>
+            </a:r>
+          </a:p>
+          <a:p>
+            <a:r>
+              <a:rPr lang="zh-CN" dirty="0"/>
+              <a:t>讲这一页时：先让学生说出上节课的结论，再逐块讲要点。</a:t>
+            </a:r>
+          </a:p>
+          <a:p>
+            <a:r>
+              <a:rPr lang="zh-CN" dirty="0"/>
+              <a:t>每讲完一块，问一句「这一步如果写错了，报错会长什么样？」——把错误提前讲。</a:t>
+            </a:r>
+          </a:p>
+          <a:p>
+            <a:r>
+              <a:rPr lang="zh-CN" dirty="0"/>
+              <a:t/>
+            </a:r>
+          </a:p>
+          <a:p>
+            <a:r>
+              <a:rPr lang="zh-CN" dirty="0"/>
+              <a:t>本节目标：独立完成单元 4 练习，确认条件判断全部过关</a:t>
+            </a:r>
+          </a:p>
+          <a:p>
+            <a:r>
+              <a:rPr lang="zh-CN" dirty="0"/>
+              <a:t/>
+            </a:r>
+          </a:p>
+          <a:p>
+            <a:r>
+              <a:rPr lang="zh-CN" dirty="0"/>
+              <a:t>看不到懂的地方，回讲义对应小节读一遍，再回来对着这页复述一次——能讲出来才算真懂。</a:t>
+            </a:r>
+          </a:p>
+        </p:txBody>
+      </p:sp>
+    </p:spTree>
+  </p:cSld>
+  <p:clrMapOvr>
+    <a:masterClrMapping/>
+  </p:clrMapOvr>
+</p:notes>
 </file>
 
 <file path=ppt/slideLayouts/slideLayout1.xml><?xml version="1.0" encoding="utf-8"?>
